--- a/DS2_2025/Day6/yugi_lecture6_oscillation.pptx
+++ b/DS2_2025/Day6/yugi_lecture6_oscillation.pptx
@@ -5,7 +5,7 @@
     <p:sldMasterId id="2147483714" r:id="rId1"/>
   </p:sldMasterIdLst>
   <p:notesMasterIdLst>
-    <p:notesMasterId r:id="rId40"/>
+    <p:notesMasterId r:id="rId41"/>
   </p:notesMasterIdLst>
   <p:sldIdLst>
     <p:sldId id="256" r:id="rId2"/>
@@ -44,8 +44,9 @@
     <p:sldId id="347" r:id="rId35"/>
     <p:sldId id="348" r:id="rId36"/>
     <p:sldId id="571" r:id="rId37"/>
-    <p:sldId id="593" r:id="rId38"/>
-    <p:sldId id="557" r:id="rId39"/>
+    <p:sldId id="595" r:id="rId38"/>
+    <p:sldId id="593" r:id="rId39"/>
+    <p:sldId id="557" r:id="rId40"/>
   </p:sldIdLst>
   <p:sldSz cx="12192000" cy="6858000"/>
   <p:notesSz cx="6858000" cy="9144000"/>
@@ -1341,162 +1342,6 @@
 </file>
 
 <file path=ppt/slideLayouts/slideLayout11.xml><?xml version="1.0" encoding="utf-8"?>
-<p:sldLayout xmlns:a="http://schemas.openxmlformats.org/drawingml/2006/main" xmlns:r="http://schemas.openxmlformats.org/officeDocument/2006/relationships" xmlns:p="http://schemas.openxmlformats.org/presentationml/2006/main" userDrawn="1">
-  <p:cSld name="1_タイトルとコンテンツ">
-    <p:spTree>
-      <p:nvGrpSpPr>
-        <p:cNvPr id="1" name=""/>
-        <p:cNvGrpSpPr/>
-        <p:nvPr/>
-      </p:nvGrpSpPr>
-      <p:grpSpPr>
-        <a:xfrm>
-          <a:off x="0" y="0"/>
-          <a:ext cx="0" cy="0"/>
-          <a:chOff x="0" y="0"/>
-          <a:chExt cx="0" cy="0"/>
-        </a:xfrm>
-      </p:grpSpPr>
-      <p:sp>
-        <p:nvSpPr>
-          <p:cNvPr id="2" name="Title 1"/>
-          <p:cNvSpPr>
-            <a:spLocks noGrp="1"/>
-          </p:cNvSpPr>
-          <p:nvPr>
-            <p:ph type="title"/>
-          </p:nvPr>
-        </p:nvSpPr>
-        <p:spPr>
-          <a:xfrm>
-            <a:off x="0" y="1"/>
-            <a:ext cx="12192000" cy="630802"/>
-          </a:xfrm>
-        </p:spPr>
-        <p:txBody>
-          <a:bodyPr>
-            <a:noAutofit/>
-          </a:bodyPr>
-          <a:lstStyle>
-            <a:lvl1pPr algn="ctr">
-              <a:defRPr sz="2800" b="0" i="0">
-                <a:ea typeface="Hiragino Kaku Gothic ProN W3" panose="020B0300000000000000" pitchFamily="34" charset="-128"/>
-              </a:defRPr>
-            </a:lvl1pPr>
-          </a:lstStyle>
-          <a:p>
-            <a:r>
-              <a:rPr lang="ja-JP" altLang="en-US" dirty="0"/>
-              <a:t>マスター タイトルの書式設定</a:t>
-            </a:r>
-            <a:endParaRPr lang="en-US" dirty="0"/>
-          </a:p>
-        </p:txBody>
-      </p:sp>
-      <p:sp>
-        <p:nvSpPr>
-          <p:cNvPr id="4" name="Date Placeholder 3"/>
-          <p:cNvSpPr>
-            <a:spLocks noGrp="1"/>
-          </p:cNvSpPr>
-          <p:nvPr>
-            <p:ph type="dt" sz="half" idx="10"/>
-          </p:nvPr>
-        </p:nvSpPr>
-        <p:spPr/>
-        <p:txBody>
-          <a:bodyPr/>
-          <a:lstStyle>
-            <a:lvl1pPr>
-              <a:defRPr b="0" i="0">
-                <a:ea typeface="Hiragino Kaku Gothic ProN W3" panose="020B0300000000000000" pitchFamily="34" charset="-128"/>
-              </a:defRPr>
-            </a:lvl1pPr>
-          </a:lstStyle>
-          <a:p>
-            <a:fld id="{38307072-EF46-4BD3-A943-EF21BC9E885E}" type="datetime1">
-              <a:rPr lang="ja-JP" altLang="en-US" smtClean="0"/>
-              <a:pPr/>
-              <a:t>2025/11/7</a:t>
-            </a:fld>
-            <a:endParaRPr lang="ja-JP" altLang="en-US"/>
-          </a:p>
-        </p:txBody>
-      </p:sp>
-      <p:sp>
-        <p:nvSpPr>
-          <p:cNvPr id="5" name="Footer Placeholder 4"/>
-          <p:cNvSpPr>
-            <a:spLocks noGrp="1"/>
-          </p:cNvSpPr>
-          <p:nvPr>
-            <p:ph type="ftr" sz="quarter" idx="11"/>
-          </p:nvPr>
-        </p:nvSpPr>
-        <p:spPr/>
-        <p:txBody>
-          <a:bodyPr/>
-          <a:lstStyle>
-            <a:lvl1pPr>
-              <a:defRPr b="0" i="0">
-                <a:ea typeface="Hiragino Kaku Gothic ProN W3" panose="020B0300000000000000" pitchFamily="34" charset="-128"/>
-              </a:defRPr>
-            </a:lvl1pPr>
-          </a:lstStyle>
-          <a:p>
-            <a:endParaRPr lang="ja-JP" altLang="en-US"/>
-          </a:p>
-        </p:txBody>
-      </p:sp>
-      <p:sp>
-        <p:nvSpPr>
-          <p:cNvPr id="6" name="Slide Number Placeholder 5"/>
-          <p:cNvSpPr>
-            <a:spLocks noGrp="1"/>
-          </p:cNvSpPr>
-          <p:nvPr>
-            <p:ph type="sldNum" sz="quarter" idx="12"/>
-          </p:nvPr>
-        </p:nvSpPr>
-        <p:spPr>
-          <a:xfrm>
-            <a:off x="9448800" y="6492876"/>
-            <a:ext cx="2743200" cy="365125"/>
-          </a:xfrm>
-        </p:spPr>
-        <p:txBody>
-          <a:bodyPr/>
-          <a:lstStyle>
-            <a:lvl1pPr>
-              <a:defRPr b="0" i="0">
-                <a:ea typeface="Hiragino Kaku Gothic ProN W3" panose="020B0300000000000000" pitchFamily="34" charset="-128"/>
-              </a:defRPr>
-            </a:lvl1pPr>
-          </a:lstStyle>
-          <a:p>
-            <a:fld id="{7897ED99-A8FC-4B43-8A57-A36A51C1578C}" type="slidenum">
-              <a:rPr lang="ja-JP" altLang="en-US" smtClean="0"/>
-              <a:pPr/>
-              <a:t>‹#›</a:t>
-            </a:fld>
-            <a:endParaRPr lang="ja-JP" altLang="en-US"/>
-          </a:p>
-        </p:txBody>
-      </p:sp>
-    </p:spTree>
-    <p:extLst>
-      <p:ext uri="{BB962C8B-B14F-4D97-AF65-F5344CB8AC3E}">
-        <p14:creationId xmlns:p14="http://schemas.microsoft.com/office/powerpoint/2010/main" val="1050249895"/>
-      </p:ext>
-    </p:extLst>
-  </p:cSld>
-  <p:clrMapOvr>
-    <a:masterClrMapping/>
-  </p:clrMapOvr>
-</p:sldLayout>
-</file>
-
-<file path=ppt/slideLayouts/slideLayout12.xml><?xml version="1.0" encoding="utf-8"?>
 <p:sldLayout xmlns:a="http://schemas.openxmlformats.org/drawingml/2006/main" xmlns:r="http://schemas.openxmlformats.org/officeDocument/2006/relationships" xmlns:p="http://schemas.openxmlformats.org/presentationml/2006/main" type="tx">
   <p:cSld name="タイトル &amp; 箇条書き">
     <p:spTree>
@@ -4043,8 +3888,7 @@
     <p:sldLayoutId id="2147483722" r:id="rId8"/>
     <p:sldLayoutId id="2147483723" r:id="rId9"/>
     <p:sldLayoutId id="2147483724" r:id="rId10"/>
-    <p:sldLayoutId id="2147483725" r:id="rId11"/>
-    <p:sldLayoutId id="2147483726" r:id="rId12"/>
+    <p:sldLayoutId id="2147483726" r:id="rId11"/>
   </p:sldLayoutIdLst>
   <p:txStyles>
     <p:titleStyle>
@@ -26110,6 +25954,128 @@
   <p:cSld>
     <p:spTree>
       <p:nvGrpSpPr>
+        <p:cNvPr id="1" name=""/>
+        <p:cNvGrpSpPr/>
+        <p:nvPr/>
+      </p:nvGrpSpPr>
+      <p:grpSpPr>
+        <a:xfrm>
+          <a:off x="0" y="0"/>
+          <a:ext cx="0" cy="0"/>
+          <a:chOff x="0" y="0"/>
+          <a:chExt cx="0" cy="0"/>
+        </a:xfrm>
+      </p:grpSpPr>
+      <p:sp>
+        <p:nvSpPr>
+          <p:cNvPr id="2" name="タイトル 1">
+            <a:extLst>
+              <a:ext uri="{FF2B5EF4-FFF2-40B4-BE49-F238E27FC236}">
+                <a16:creationId xmlns:a16="http://schemas.microsoft.com/office/drawing/2014/main" id="{F3DF2E7C-C550-7288-8311-51F01AF300D5}"/>
+              </a:ext>
+            </a:extLst>
+          </p:cNvPr>
+          <p:cNvSpPr>
+            <a:spLocks noGrp="1"/>
+          </p:cNvSpPr>
+          <p:nvPr>
+            <p:ph type="title"/>
+          </p:nvPr>
+        </p:nvSpPr>
+        <p:spPr/>
+        <p:txBody>
+          <a:bodyPr/>
+          <a:lstStyle/>
+          <a:p>
+            <a:r>
+              <a:rPr kumimoji="1" lang="en-US" altLang="ja-JP" dirty="0"/>
+              <a:t>Goodwin</a:t>
+            </a:r>
+            <a:r>
+              <a:rPr kumimoji="1" lang="ja-JP" altLang="en-US"/>
+              <a:t>モデルの時系列と相平面</a:t>
+            </a:r>
+          </a:p>
+        </p:txBody>
+      </p:sp>
+      <p:pic>
+        <p:nvPicPr>
+          <p:cNvPr id="3" name="図 2">
+            <a:extLst>
+              <a:ext uri="{FF2B5EF4-FFF2-40B4-BE49-F238E27FC236}">
+                <a16:creationId xmlns:a16="http://schemas.microsoft.com/office/drawing/2014/main" id="{1DF7A322-B469-4334-85AC-E80EC62F1DD0}"/>
+              </a:ext>
+            </a:extLst>
+          </p:cNvPr>
+          <p:cNvPicPr>
+            <a:picLocks noChangeAspect="1"/>
+          </p:cNvPicPr>
+          <p:nvPr/>
+        </p:nvPicPr>
+        <p:blipFill>
+          <a:blip r:embed="rId2"/>
+          <a:stretch>
+            <a:fillRect/>
+          </a:stretch>
+        </p:blipFill>
+        <p:spPr>
+          <a:xfrm>
+            <a:off x="5951621" y="1313329"/>
+            <a:ext cx="6240379" cy="4680284"/>
+          </a:xfrm>
+          <a:prstGeom prst="rect">
+            <a:avLst/>
+          </a:prstGeom>
+        </p:spPr>
+      </p:pic>
+      <p:pic>
+        <p:nvPicPr>
+          <p:cNvPr id="4" name="図 3">
+            <a:extLst>
+              <a:ext uri="{FF2B5EF4-FFF2-40B4-BE49-F238E27FC236}">
+                <a16:creationId xmlns:a16="http://schemas.microsoft.com/office/drawing/2014/main" id="{61698729-8D61-1053-A716-6C9CBB50A948}"/>
+              </a:ext>
+            </a:extLst>
+          </p:cNvPr>
+          <p:cNvPicPr>
+            <a:picLocks noChangeAspect="1"/>
+          </p:cNvPicPr>
+          <p:nvPr/>
+        </p:nvPicPr>
+        <p:blipFill>
+          <a:blip r:embed="rId3"/>
+          <a:stretch>
+            <a:fillRect/>
+          </a:stretch>
+        </p:blipFill>
+        <p:spPr>
+          <a:xfrm>
+            <a:off x="0" y="1313329"/>
+            <a:ext cx="6240379" cy="4680285"/>
+          </a:xfrm>
+          <a:prstGeom prst="rect">
+            <a:avLst/>
+          </a:prstGeom>
+        </p:spPr>
+      </p:pic>
+    </p:spTree>
+    <p:extLst>
+      <p:ext uri="{BB962C8B-B14F-4D97-AF65-F5344CB8AC3E}">
+        <p14:creationId xmlns:p14="http://schemas.microsoft.com/office/powerpoint/2010/main" val="2890633971"/>
+      </p:ext>
+    </p:extLst>
+  </p:cSld>
+  <p:clrMapOvr>
+    <a:masterClrMapping/>
+  </p:clrMapOvr>
+</p:sld>
+</file>
+
+<file path=ppt/slides/slide38.xml><?xml version="1.0" encoding="utf-8"?>
+<p:sld xmlns:a="http://schemas.openxmlformats.org/drawingml/2006/main" xmlns:r="http://schemas.openxmlformats.org/officeDocument/2006/relationships" xmlns:p="http://schemas.openxmlformats.org/presentationml/2006/main">
+  <p:cSld>
+    <p:spTree>
+      <p:nvGrpSpPr>
         <p:cNvPr id="1" name="">
           <a:extLst>
             <a:ext uri="{FF2B5EF4-FFF2-40B4-BE49-F238E27FC236}">
@@ -26212,13 +26178,67 @@
               <a:t>Q. </a:t>
             </a:r>
             <a:r>
+              <a:rPr lang="en-US" sz="3600" dirty="0" err="1"/>
+              <a:t>解糖系</a:t>
+            </a:r>
+            <a:r>
+              <a:rPr lang="en-US" sz="3600" dirty="0"/>
+              <a:t> (</a:t>
+            </a:r>
+            <a:r>
+              <a:rPr lang="en-US" sz="3600" dirty="0" err="1"/>
+              <a:t>Sel’kovモデル</a:t>
+            </a:r>
+            <a:r>
+              <a:rPr lang="en-US" sz="3600" dirty="0"/>
+              <a:t>)</a:t>
+            </a:r>
+            <a:r>
+              <a:rPr lang="en-US" sz="3600" dirty="0" err="1"/>
+              <a:t>はなぜ振動するのか</a:t>
+            </a:r>
+            <a:r>
+              <a:rPr lang="en-US" sz="3600" dirty="0"/>
+              <a:t>？</a:t>
+            </a:r>
+          </a:p>
+          <a:p>
+            <a:pPr marL="352856" indent="-315468" defTabSz="373888">
+              <a:spcBef>
+                <a:spcPts val="1500"/>
+              </a:spcBef>
+              <a:buClr>
+                <a:srgbClr val="000000"/>
+              </a:buClr>
+              <a:buSzPct val="100000"/>
+              <a:buFont typeface="Arial"/>
+              <a:defRPr sz="2208"/>
+            </a:pPr>
+            <a:r>
+              <a:rPr lang="en-US" altLang="ja-JP" sz="3600" dirty="0"/>
+              <a:t>A. </a:t>
+            </a:r>
+            <a:r>
+              <a:rPr lang="ja-JP" altLang="en-US" sz="3600"/>
+              <a:t>生化学反応系が</a:t>
+            </a:r>
+            <a:r>
+              <a:rPr lang="en-US" altLang="ja-JP" sz="3600" dirty="0"/>
+              <a:t> </a:t>
+            </a:r>
+            <a:r>
+              <a:rPr sz="3600" dirty="0"/>
+              <a:t>Hopf </a:t>
+            </a:r>
+            <a:r>
               <a:rPr sz="3600" dirty="0" err="1"/>
-              <a:t>生物リズムはなぜ起こるか</a:t>
-            </a:r>
-            <a:r>
-              <a:rPr sz="3600" dirty="0"/>
-              <a:t>？</a:t>
-            </a:r>
+              <a:t>分岐</a:t>
+            </a:r>
+            <a:r>
+              <a:rPr lang="ja-JP" altLang="en-US" sz="3600"/>
+              <a:t>を起こす形になっていたから</a:t>
+            </a:r>
+            <a:endParaRPr lang="en-US" altLang="ja-JP" sz="3600" dirty="0"/>
           </a:p>
           <a:p>
             <a:pPr marL="320852" indent="-262890" defTabSz="373888">
@@ -26232,31 +26252,7 @@
               <a:buFont typeface="Arial"/>
               <a:defRPr sz="2208"/>
             </a:pPr>
-            <a:r>
-              <a:rPr lang="en-US" altLang="ja-JP" sz="3600" dirty="0"/>
-              <a:t>A. </a:t>
-            </a:r>
-            <a:r>
-              <a:rPr lang="ja-JP" altLang="en-US" sz="3600"/>
-              <a:t>その生化学反応系が</a:t>
-            </a:r>
-            <a:r>
-              <a:rPr lang="en-US" altLang="ja-JP" sz="3600" dirty="0"/>
-              <a:t> </a:t>
-            </a:r>
-            <a:r>
-              <a:rPr sz="3600" dirty="0"/>
-              <a:t>Hopf </a:t>
-            </a:r>
-            <a:r>
-              <a:rPr sz="3600" dirty="0" err="1"/>
-              <a:t>分岐</a:t>
-            </a:r>
-            <a:r>
-              <a:rPr lang="ja-JP" altLang="en-US" sz="3600"/>
-              <a:t>を起こす形になっていたから</a:t>
-            </a:r>
-            <a:endParaRPr lang="en-US" altLang="ja-JP" sz="3600" dirty="0"/>
+            <a:endParaRPr lang="en-US" sz="3600" dirty="0"/>
           </a:p>
           <a:p>
             <a:pPr marL="320852" indent="-262890" defTabSz="373888">
@@ -26270,23 +26266,9 @@
               <a:buFont typeface="Arial"/>
               <a:defRPr sz="2208"/>
             </a:pPr>
-            <a:endParaRPr lang="en-US" sz="3600" dirty="0"/>
-          </a:p>
-          <a:p>
-            <a:pPr marL="320852" indent="-262890" defTabSz="373888">
-              <a:spcBef>
-                <a:spcPts val="1500"/>
-              </a:spcBef>
-              <a:buClr>
-                <a:srgbClr val="000000"/>
-              </a:buClr>
-              <a:buSzPct val="100000"/>
-              <a:buFont typeface="Arial"/>
-              <a:defRPr sz="2208"/>
-            </a:pPr>
             <a:r>
               <a:rPr lang="ja-JP" altLang="en-US" sz="3600"/>
-              <a:t>景気循環も生物リズムも数学的に同じ構造</a:t>
+              <a:t>景気循環も生物リズムも非線形力学系の振動</a:t>
             </a:r>
             <a:endParaRPr lang="en-US" altLang="ja-JP" sz="3600" dirty="0"/>
           </a:p>
@@ -26345,7 +26327,7 @@
 </p:sld>
 </file>
 
-<file path=ppt/slides/slide38.xml><?xml version="1.0" encoding="utf-8"?>
+<file path=ppt/slides/slide39.xml><?xml version="1.0" encoding="utf-8"?>
 <p:sld xmlns:a="http://schemas.openxmlformats.org/drawingml/2006/main" xmlns:r="http://schemas.openxmlformats.org/officeDocument/2006/relationships" xmlns:p="http://schemas.openxmlformats.org/presentationml/2006/main">
   <p:cSld>
     <p:spTree>

--- a/DS2_2025/Day6/yugi_lecture6_oscillation.pptx
+++ b/DS2_2025/Day6/yugi_lecture6_oscillation.pptx
@@ -235,7 +235,7 @@
           <a:p>
             <a:fld id="{11C3C840-1276-6B4F-8604-7EE6E066B4F8}" type="datetimeFigureOut">
               <a:rPr kumimoji="1" lang="ja-JP" altLang="en-US" smtClean="0"/>
-              <a:t>2025/11/7</a:t>
+              <a:t>2025/11/8</a:t>
             </a:fld>
             <a:endParaRPr kumimoji="1" lang="ja-JP" altLang="en-US"/>
           </a:p>
@@ -1063,7 +1063,7 @@
             <a:fld id="{C8BC208A-B9F0-7945-ADEB-1A1AFDC48EA0}" type="datetimeFigureOut">
               <a:rPr lang="ja-JP" altLang="en-US" smtClean="0"/>
               <a:pPr/>
-              <a:t>2025/11/7</a:t>
+              <a:t>2025/11/8</a:t>
             </a:fld>
             <a:endParaRPr lang="ja-JP" altLang="en-US"/>
           </a:p>
@@ -1659,7 +1659,7 @@
             <a:fld id="{C8BC208A-B9F0-7945-ADEB-1A1AFDC48EA0}" type="datetimeFigureOut">
               <a:rPr lang="ja-JP" altLang="en-US" smtClean="0"/>
               <a:pPr/>
-              <a:t>2025/11/7</a:t>
+              <a:t>2025/11/8</a:t>
             </a:fld>
             <a:endParaRPr lang="ja-JP" altLang="en-US"/>
           </a:p>
@@ -1950,7 +1950,7 @@
             <a:fld id="{C8BC208A-B9F0-7945-ADEB-1A1AFDC48EA0}" type="datetimeFigureOut">
               <a:rPr lang="ja-JP" altLang="en-US" smtClean="0"/>
               <a:pPr/>
-              <a:t>2025/11/7</a:t>
+              <a:t>2025/11/8</a:t>
             </a:fld>
             <a:endParaRPr lang="ja-JP" altLang="en-US"/>
           </a:p>
@@ -2267,7 +2267,7 @@
             <a:fld id="{C8BC208A-B9F0-7945-ADEB-1A1AFDC48EA0}" type="datetimeFigureOut">
               <a:rPr lang="ja-JP" altLang="en-US" smtClean="0"/>
               <a:pPr/>
-              <a:t>2025/11/7</a:t>
+              <a:t>2025/11/8</a:t>
             </a:fld>
             <a:endParaRPr lang="ja-JP" altLang="en-US"/>
           </a:p>
@@ -2791,7 +2791,7 @@
             <a:fld id="{C8BC208A-B9F0-7945-ADEB-1A1AFDC48EA0}" type="datetimeFigureOut">
               <a:rPr lang="ja-JP" altLang="en-US" smtClean="0"/>
               <a:pPr/>
-              <a:t>2025/11/7</a:t>
+              <a:t>2025/11/8</a:t>
             </a:fld>
             <a:endParaRPr lang="ja-JP" altLang="en-US"/>
           </a:p>
@@ -2892,7 +2892,7 @@
             <a:fld id="{C8BC208A-B9F0-7945-ADEB-1A1AFDC48EA0}" type="datetimeFigureOut">
               <a:rPr lang="ja-JP" altLang="en-US" smtClean="0"/>
               <a:pPr/>
-              <a:t>2025/11/7</a:t>
+              <a:t>2025/11/8</a:t>
             </a:fld>
             <a:endParaRPr lang="ja-JP" altLang="en-US"/>
           </a:p>
@@ -3033,7 +3033,7 @@
             <a:fld id="{C8BC208A-B9F0-7945-ADEB-1A1AFDC48EA0}" type="datetimeFigureOut">
               <a:rPr lang="ja-JP" altLang="en-US" smtClean="0"/>
               <a:pPr/>
-              <a:t>2025/11/7</a:t>
+              <a:t>2025/11/8</a:t>
             </a:fld>
             <a:endParaRPr lang="ja-JP" altLang="en-US"/>
           </a:p>
@@ -3364,7 +3364,7 @@
             <a:fld id="{C8BC208A-B9F0-7945-ADEB-1A1AFDC48EA0}" type="datetimeFigureOut">
               <a:rPr lang="ja-JP" altLang="en-US" smtClean="0"/>
               <a:pPr/>
-              <a:t>2025/11/7</a:t>
+              <a:t>2025/11/8</a:t>
             </a:fld>
             <a:endParaRPr lang="ja-JP" altLang="en-US"/>
           </a:p>
@@ -3667,7 +3667,7 @@
             <a:fld id="{C8BC208A-B9F0-7945-ADEB-1A1AFDC48EA0}" type="datetimeFigureOut">
               <a:rPr lang="ja-JP" altLang="en-US" smtClean="0"/>
               <a:pPr/>
-              <a:t>2025/11/7</a:t>
+              <a:t>2025/11/8</a:t>
             </a:fld>
             <a:endParaRPr lang="ja-JP" altLang="en-US"/>
           </a:p>
@@ -6663,7 +6663,7 @@
           </a:ln>
           <a:extLst>
             <a:ext uri="{C572A759-6A51-4108-AA02-DFA0A04FC94B}">
-              <ma14:wrappingTextBoxFlag xmlns:ma14="http://schemas.microsoft.com/office/mac/drawingml/2011/main" xmlns:a14="http://schemas.microsoft.com/office/drawing/2010/main" xmlns:m="http://schemas.openxmlformats.org/officeDocument/2006/math" xmlns="" val="1"/>
+              <ma14:wrappingTextBoxFlag xmlns="" xmlns:m="http://schemas.openxmlformats.org/officeDocument/2006/math" xmlns:a14="http://schemas.microsoft.com/office/drawing/2010/main" xmlns:ma14="http://schemas.microsoft.com/office/mac/drawingml/2011/main" val="1"/>
             </a:ext>
           </a:extLst>
         </p:spPr>
@@ -7774,7 +7774,7 @@
           </a:ln>
           <a:extLst>
             <a:ext uri="{C572A759-6A51-4108-AA02-DFA0A04FC94B}">
-              <ma14:wrappingTextBoxFlag xmlns:ma14="http://schemas.microsoft.com/office/mac/drawingml/2011/main" xmlns:a14="http://schemas.microsoft.com/office/drawing/2010/main" xmlns:m="http://schemas.openxmlformats.org/officeDocument/2006/math" xmlns="" val="1"/>
+              <ma14:wrappingTextBoxFlag xmlns="" xmlns:m="http://schemas.openxmlformats.org/officeDocument/2006/math" xmlns:a14="http://schemas.microsoft.com/office/drawing/2010/main" xmlns:ma14="http://schemas.microsoft.com/office/mac/drawingml/2011/main" val="1"/>
             </a:ext>
           </a:extLst>
         </p:spPr>
@@ -7822,7 +7822,7 @@
           </a:ln>
           <a:extLst>
             <a:ext uri="{C572A759-6A51-4108-AA02-DFA0A04FC94B}">
-              <ma14:wrappingTextBoxFlag xmlns:ma14="http://schemas.microsoft.com/office/mac/drawingml/2011/main" xmlns:a14="http://schemas.microsoft.com/office/drawing/2010/main" xmlns:m="http://schemas.openxmlformats.org/officeDocument/2006/math" xmlns="" val="1"/>
+              <ma14:wrappingTextBoxFlag xmlns="" xmlns:m="http://schemas.openxmlformats.org/officeDocument/2006/math" xmlns:a14="http://schemas.microsoft.com/office/drawing/2010/main" xmlns:ma14="http://schemas.microsoft.com/office/mac/drawingml/2011/main" val="1"/>
             </a:ext>
           </a:extLst>
         </p:spPr>
@@ -7998,7 +7998,7 @@
           </a:ln>
           <a:extLst>
             <a:ext uri="{C572A759-6A51-4108-AA02-DFA0A04FC94B}">
-              <ma14:wrappingTextBoxFlag xmlns:ma14="http://schemas.microsoft.com/office/mac/drawingml/2011/main" xmlns:a14="http://schemas.microsoft.com/office/drawing/2010/main" xmlns:m="http://schemas.openxmlformats.org/officeDocument/2006/math" xmlns="" val="1"/>
+              <ma14:wrappingTextBoxFlag xmlns="" xmlns:m="http://schemas.openxmlformats.org/officeDocument/2006/math" xmlns:a14="http://schemas.microsoft.com/office/drawing/2010/main" xmlns:ma14="http://schemas.microsoft.com/office/mac/drawingml/2011/main" val="1"/>
             </a:ext>
           </a:extLst>
         </p:spPr>
@@ -8053,7 +8053,7 @@
           </a:ln>
           <a:extLst>
             <a:ext uri="{C572A759-6A51-4108-AA02-DFA0A04FC94B}">
-              <ma14:wrappingTextBoxFlag xmlns:ma14="http://schemas.microsoft.com/office/mac/drawingml/2011/main" xmlns:a14="http://schemas.microsoft.com/office/drawing/2010/main" xmlns:m="http://schemas.openxmlformats.org/officeDocument/2006/math" xmlns="" val="1"/>
+              <ma14:wrappingTextBoxFlag xmlns="" xmlns:m="http://schemas.openxmlformats.org/officeDocument/2006/math" xmlns:a14="http://schemas.microsoft.com/office/drawing/2010/main" xmlns:ma14="http://schemas.microsoft.com/office/mac/drawingml/2011/main" val="1"/>
             </a:ext>
           </a:extLst>
         </p:spPr>
@@ -8182,7 +8182,7 @@
           </a:ln>
           <a:extLst>
             <a:ext uri="{C572A759-6A51-4108-AA02-DFA0A04FC94B}">
-              <ma14:wrappingTextBoxFlag xmlns:ma14="http://schemas.microsoft.com/office/mac/drawingml/2011/main" xmlns:a14="http://schemas.microsoft.com/office/drawing/2010/main" xmlns:m="http://schemas.openxmlformats.org/officeDocument/2006/math" xmlns="" val="1"/>
+              <ma14:wrappingTextBoxFlag xmlns="" xmlns:m="http://schemas.openxmlformats.org/officeDocument/2006/math" xmlns:a14="http://schemas.microsoft.com/office/drawing/2010/main" xmlns:ma14="http://schemas.microsoft.com/office/mac/drawingml/2011/main" val="1"/>
             </a:ext>
           </a:extLst>
         </p:spPr>
@@ -8237,7 +8237,7 @@
           </a:ln>
           <a:extLst>
             <a:ext uri="{C572A759-6A51-4108-AA02-DFA0A04FC94B}">
-              <ma14:wrappingTextBoxFlag xmlns:ma14="http://schemas.microsoft.com/office/mac/drawingml/2011/main" xmlns:a14="http://schemas.microsoft.com/office/drawing/2010/main" xmlns:m="http://schemas.openxmlformats.org/officeDocument/2006/math" xmlns="" val="1"/>
+              <ma14:wrappingTextBoxFlag xmlns="" xmlns:m="http://schemas.openxmlformats.org/officeDocument/2006/math" xmlns:a14="http://schemas.microsoft.com/office/drawing/2010/main" xmlns:ma14="http://schemas.microsoft.com/office/mac/drawingml/2011/main" val="1"/>
             </a:ext>
           </a:extLst>
         </p:spPr>
@@ -8298,7 +8298,7 @@
           </a:ln>
           <a:extLst>
             <a:ext uri="{C572A759-6A51-4108-AA02-DFA0A04FC94B}">
-              <ma14:wrappingTextBoxFlag xmlns:ma14="http://schemas.microsoft.com/office/mac/drawingml/2011/main" xmlns:a14="http://schemas.microsoft.com/office/drawing/2010/main" xmlns:m="http://schemas.openxmlformats.org/officeDocument/2006/math" xmlns="" val="1"/>
+              <ma14:wrappingTextBoxFlag xmlns="" xmlns:m="http://schemas.openxmlformats.org/officeDocument/2006/math" xmlns:a14="http://schemas.microsoft.com/office/drawing/2010/main" xmlns:ma14="http://schemas.microsoft.com/office/mac/drawingml/2011/main" val="1"/>
             </a:ext>
           </a:extLst>
         </p:spPr>
@@ -8654,7 +8654,7 @@
           </a:ln>
           <a:extLst>
             <a:ext uri="{C572A759-6A51-4108-AA02-DFA0A04FC94B}">
-              <ma14:wrappingTextBoxFlag xmlns:ma14="http://schemas.microsoft.com/office/mac/drawingml/2011/main" xmlns:a14="http://schemas.microsoft.com/office/drawing/2010/main" xmlns:m="http://schemas.openxmlformats.org/officeDocument/2006/math" xmlns="" val="1"/>
+              <ma14:wrappingTextBoxFlag xmlns="" xmlns:m="http://schemas.openxmlformats.org/officeDocument/2006/math" xmlns:a14="http://schemas.microsoft.com/office/drawing/2010/main" xmlns:ma14="http://schemas.microsoft.com/office/mac/drawingml/2011/main" val="1"/>
             </a:ext>
           </a:extLst>
         </p:spPr>
@@ -8825,7 +8825,7 @@
           </a:ln>
           <a:extLst>
             <a:ext uri="{C572A759-6A51-4108-AA02-DFA0A04FC94B}">
-              <ma14:wrappingTextBoxFlag xmlns:ma14="http://schemas.microsoft.com/office/mac/drawingml/2011/main" xmlns:a14="http://schemas.microsoft.com/office/drawing/2010/main" xmlns:m="http://schemas.openxmlformats.org/officeDocument/2006/math" xmlns="" val="1"/>
+              <ma14:wrappingTextBoxFlag xmlns="" xmlns:m="http://schemas.openxmlformats.org/officeDocument/2006/math" xmlns:a14="http://schemas.microsoft.com/office/drawing/2010/main" xmlns:ma14="http://schemas.microsoft.com/office/mac/drawingml/2011/main" val="1"/>
             </a:ext>
           </a:extLst>
         </p:spPr>
@@ -9243,7 +9243,7 @@
           </a:ln>
           <a:extLst>
             <a:ext uri="{C572A759-6A51-4108-AA02-DFA0A04FC94B}">
-              <ma14:wrappingTextBoxFlag xmlns:ma14="http://schemas.microsoft.com/office/mac/drawingml/2011/main" xmlns:a14="http://schemas.microsoft.com/office/drawing/2010/main" xmlns:m="http://schemas.openxmlformats.org/officeDocument/2006/math" xmlns="" val="1"/>
+              <ma14:wrappingTextBoxFlag xmlns="" xmlns:m="http://schemas.openxmlformats.org/officeDocument/2006/math" xmlns:a14="http://schemas.microsoft.com/office/drawing/2010/main" xmlns:ma14="http://schemas.microsoft.com/office/mac/drawingml/2011/main" val="1"/>
             </a:ext>
           </a:extLst>
         </p:spPr>
@@ -9304,7 +9304,7 @@
           </a:ln>
           <a:extLst>
             <a:ext uri="{C572A759-6A51-4108-AA02-DFA0A04FC94B}">
-              <ma14:wrappingTextBoxFlag xmlns:ma14="http://schemas.microsoft.com/office/mac/drawingml/2011/main" xmlns:a14="http://schemas.microsoft.com/office/drawing/2010/main" xmlns:m="http://schemas.openxmlformats.org/officeDocument/2006/math" xmlns="" val="1"/>
+              <ma14:wrappingTextBoxFlag xmlns="" xmlns:m="http://schemas.openxmlformats.org/officeDocument/2006/math" xmlns:a14="http://schemas.microsoft.com/office/drawing/2010/main" xmlns:ma14="http://schemas.microsoft.com/office/mac/drawingml/2011/main" val="1"/>
             </a:ext>
           </a:extLst>
         </p:spPr>
@@ -9347,7 +9347,7 @@
           </a:ln>
           <a:extLst>
             <a:ext uri="{C572A759-6A51-4108-AA02-DFA0A04FC94B}">
-              <ma14:wrappingTextBoxFlag xmlns:ma14="http://schemas.microsoft.com/office/mac/drawingml/2011/main" xmlns:a14="http://schemas.microsoft.com/office/drawing/2010/main" xmlns:m="http://schemas.openxmlformats.org/officeDocument/2006/math" xmlns="" val="1"/>
+              <ma14:wrappingTextBoxFlag xmlns="" xmlns:m="http://schemas.openxmlformats.org/officeDocument/2006/math" xmlns:a14="http://schemas.microsoft.com/office/drawing/2010/main" xmlns:ma14="http://schemas.microsoft.com/office/mac/drawingml/2011/main" val="1"/>
             </a:ext>
           </a:extLst>
         </p:spPr>
@@ -9455,7 +9455,7 @@
           </a:ln>
           <a:extLst>
             <a:ext uri="{C572A759-6A51-4108-AA02-DFA0A04FC94B}">
-              <ma14:wrappingTextBoxFlag xmlns:ma14="http://schemas.microsoft.com/office/mac/drawingml/2011/main" xmlns:a14="http://schemas.microsoft.com/office/drawing/2010/main" xmlns:m="http://schemas.openxmlformats.org/officeDocument/2006/math" xmlns="" val="1"/>
+              <ma14:wrappingTextBoxFlag xmlns="" xmlns:m="http://schemas.openxmlformats.org/officeDocument/2006/math" xmlns:a14="http://schemas.microsoft.com/office/drawing/2010/main" xmlns:ma14="http://schemas.microsoft.com/office/mac/drawingml/2011/main" val="1"/>
             </a:ext>
           </a:extLst>
         </p:spPr>
@@ -9506,7 +9506,7 @@
           </a:ln>
           <a:extLst>
             <a:ext uri="{C572A759-6A51-4108-AA02-DFA0A04FC94B}">
-              <ma14:wrappingTextBoxFlag xmlns:ma14="http://schemas.microsoft.com/office/mac/drawingml/2011/main" xmlns:a14="http://schemas.microsoft.com/office/drawing/2010/main" xmlns:m="http://schemas.openxmlformats.org/officeDocument/2006/math" xmlns="" val="1"/>
+              <ma14:wrappingTextBoxFlag xmlns="" xmlns:m="http://schemas.openxmlformats.org/officeDocument/2006/math" xmlns:a14="http://schemas.microsoft.com/office/drawing/2010/main" xmlns:ma14="http://schemas.microsoft.com/office/mac/drawingml/2011/main" val="1"/>
             </a:ext>
           </a:extLst>
         </p:spPr>
@@ -9557,7 +9557,7 @@
           </a:ln>
           <a:extLst>
             <a:ext uri="{C572A759-6A51-4108-AA02-DFA0A04FC94B}">
-              <ma14:wrappingTextBoxFlag xmlns:ma14="http://schemas.microsoft.com/office/mac/drawingml/2011/main" xmlns:a14="http://schemas.microsoft.com/office/drawing/2010/main" xmlns:m="http://schemas.openxmlformats.org/officeDocument/2006/math" xmlns="" val="1"/>
+              <ma14:wrappingTextBoxFlag xmlns="" xmlns:m="http://schemas.openxmlformats.org/officeDocument/2006/math" xmlns:a14="http://schemas.microsoft.com/office/drawing/2010/main" xmlns:ma14="http://schemas.microsoft.com/office/mac/drawingml/2011/main" val="1"/>
             </a:ext>
           </a:extLst>
         </p:spPr>
@@ -9609,7 +9609,7 @@
           </a:ln>
           <a:extLst>
             <a:ext uri="{C572A759-6A51-4108-AA02-DFA0A04FC94B}">
-              <ma14:wrappingTextBoxFlag xmlns:ma14="http://schemas.microsoft.com/office/mac/drawingml/2011/main" xmlns:a14="http://schemas.microsoft.com/office/drawing/2010/main" xmlns:m="http://schemas.openxmlformats.org/officeDocument/2006/math" xmlns="" val="1"/>
+              <ma14:wrappingTextBoxFlag xmlns="" xmlns:m="http://schemas.openxmlformats.org/officeDocument/2006/math" xmlns:a14="http://schemas.microsoft.com/office/drawing/2010/main" xmlns:ma14="http://schemas.microsoft.com/office/mac/drawingml/2011/main" val="1"/>
             </a:ext>
           </a:extLst>
         </p:spPr>
@@ -9669,7 +9669,7 @@
           </a:ln>
           <a:extLst>
             <a:ext uri="{C572A759-6A51-4108-AA02-DFA0A04FC94B}">
-              <ma14:wrappingTextBoxFlag xmlns:ma14="http://schemas.microsoft.com/office/mac/drawingml/2011/main" xmlns:a14="http://schemas.microsoft.com/office/drawing/2010/main" xmlns:m="http://schemas.openxmlformats.org/officeDocument/2006/math" xmlns="" val="1"/>
+              <ma14:wrappingTextBoxFlag xmlns="" xmlns:m="http://schemas.openxmlformats.org/officeDocument/2006/math" xmlns:a14="http://schemas.microsoft.com/office/drawing/2010/main" xmlns:ma14="http://schemas.microsoft.com/office/mac/drawingml/2011/main" val="1"/>
             </a:ext>
           </a:extLst>
         </p:spPr>
@@ -9720,7 +9720,7 @@
           </a:ln>
           <a:extLst>
             <a:ext uri="{C572A759-6A51-4108-AA02-DFA0A04FC94B}">
-              <ma14:wrappingTextBoxFlag xmlns:ma14="http://schemas.microsoft.com/office/mac/drawingml/2011/main" xmlns:a14="http://schemas.microsoft.com/office/drawing/2010/main" xmlns:m="http://schemas.openxmlformats.org/officeDocument/2006/math" xmlns="" val="1"/>
+              <ma14:wrappingTextBoxFlag xmlns="" xmlns:m="http://schemas.openxmlformats.org/officeDocument/2006/math" xmlns:a14="http://schemas.microsoft.com/office/drawing/2010/main" xmlns:ma14="http://schemas.microsoft.com/office/mac/drawingml/2011/main" val="1"/>
             </a:ext>
           </a:extLst>
         </p:spPr>
@@ -10332,7 +10332,7 @@
           </a:ln>
           <a:extLst>
             <a:ext uri="{C572A759-6A51-4108-AA02-DFA0A04FC94B}">
-              <ma14:wrappingTextBoxFlag xmlns:ma14="http://schemas.microsoft.com/office/mac/drawingml/2011/main" xmlns:a14="http://schemas.microsoft.com/office/drawing/2010/main" xmlns:m="http://schemas.openxmlformats.org/officeDocument/2006/math" xmlns="" val="1"/>
+              <ma14:wrappingTextBoxFlag xmlns="" xmlns:m="http://schemas.openxmlformats.org/officeDocument/2006/math" xmlns:a14="http://schemas.microsoft.com/office/drawing/2010/main" xmlns:ma14="http://schemas.microsoft.com/office/mac/drawingml/2011/main" val="1"/>
             </a:ext>
           </a:extLst>
         </p:spPr>
@@ -10633,7 +10633,7 @@
           </a:ln>
           <a:extLst>
             <a:ext uri="{C572A759-6A51-4108-AA02-DFA0A04FC94B}">
-              <ma14:wrappingTextBoxFlag xmlns:ma14="http://schemas.microsoft.com/office/mac/drawingml/2011/main" xmlns:a14="http://schemas.microsoft.com/office/drawing/2010/main" xmlns:m="http://schemas.openxmlformats.org/officeDocument/2006/math" xmlns="" val="1"/>
+              <ma14:wrappingTextBoxFlag xmlns="" xmlns:m="http://schemas.openxmlformats.org/officeDocument/2006/math" xmlns:a14="http://schemas.microsoft.com/office/drawing/2010/main" xmlns:ma14="http://schemas.microsoft.com/office/mac/drawingml/2011/main" val="1"/>
             </a:ext>
           </a:extLst>
         </p:spPr>
@@ -10848,7 +10848,7 @@
           </a:ln>
           <a:extLst>
             <a:ext uri="{C572A759-6A51-4108-AA02-DFA0A04FC94B}">
-              <ma14:wrappingTextBoxFlag xmlns:ma14="http://schemas.microsoft.com/office/mac/drawingml/2011/main" xmlns:a14="http://schemas.microsoft.com/office/drawing/2010/main" xmlns:m="http://schemas.openxmlformats.org/officeDocument/2006/math" xmlns="" val="1"/>
+              <ma14:wrappingTextBoxFlag xmlns="" xmlns:m="http://schemas.openxmlformats.org/officeDocument/2006/math" xmlns:a14="http://schemas.microsoft.com/office/drawing/2010/main" xmlns:ma14="http://schemas.microsoft.com/office/mac/drawingml/2011/main" val="1"/>
             </a:ext>
           </a:extLst>
         </p:spPr>
@@ -10940,7 +10940,7 @@
           </a:ln>
           <a:extLst>
             <a:ext uri="{C572A759-6A51-4108-AA02-DFA0A04FC94B}">
-              <ma14:wrappingTextBoxFlag xmlns:ma14="http://schemas.microsoft.com/office/mac/drawingml/2011/main" xmlns:a14="http://schemas.microsoft.com/office/drawing/2010/main" xmlns:m="http://schemas.openxmlformats.org/officeDocument/2006/math" xmlns="" val="1"/>
+              <ma14:wrappingTextBoxFlag xmlns="" xmlns:m="http://schemas.openxmlformats.org/officeDocument/2006/math" xmlns:a14="http://schemas.microsoft.com/office/drawing/2010/main" xmlns:ma14="http://schemas.microsoft.com/office/mac/drawingml/2011/main" val="1"/>
             </a:ext>
           </a:extLst>
         </p:spPr>
@@ -11023,7 +11023,7 @@
           </a:ln>
           <a:extLst>
             <a:ext uri="{C572A759-6A51-4108-AA02-DFA0A04FC94B}">
-              <ma14:wrappingTextBoxFlag xmlns:ma14="http://schemas.microsoft.com/office/mac/drawingml/2011/main" xmlns:a14="http://schemas.microsoft.com/office/drawing/2010/main" xmlns:m="http://schemas.openxmlformats.org/officeDocument/2006/math" xmlns="" val="1"/>
+              <ma14:wrappingTextBoxFlag xmlns="" xmlns:m="http://schemas.openxmlformats.org/officeDocument/2006/math" xmlns:a14="http://schemas.microsoft.com/office/drawing/2010/main" xmlns:ma14="http://schemas.microsoft.com/office/mac/drawingml/2011/main" val="1"/>
             </a:ext>
           </a:extLst>
         </p:spPr>
@@ -11075,7 +11075,7 @@
           </a:ln>
           <a:extLst>
             <a:ext uri="{C572A759-6A51-4108-AA02-DFA0A04FC94B}">
-              <ma14:wrappingTextBoxFlag xmlns:ma14="http://schemas.microsoft.com/office/mac/drawingml/2011/main" xmlns:a14="http://schemas.microsoft.com/office/drawing/2010/main" xmlns:m="http://schemas.openxmlformats.org/officeDocument/2006/math" xmlns="" val="1"/>
+              <ma14:wrappingTextBoxFlag xmlns="" xmlns:m="http://schemas.openxmlformats.org/officeDocument/2006/math" xmlns:a14="http://schemas.microsoft.com/office/drawing/2010/main" xmlns:ma14="http://schemas.microsoft.com/office/mac/drawingml/2011/main" val="1"/>
             </a:ext>
           </a:extLst>
         </p:spPr>
@@ -11126,7 +11126,7 @@
           </a:ln>
           <a:extLst>
             <a:ext uri="{C572A759-6A51-4108-AA02-DFA0A04FC94B}">
-              <ma14:wrappingTextBoxFlag xmlns:ma14="http://schemas.microsoft.com/office/mac/drawingml/2011/main" xmlns:a14="http://schemas.microsoft.com/office/drawing/2010/main" xmlns:m="http://schemas.openxmlformats.org/officeDocument/2006/math" xmlns="" val="1"/>
+              <ma14:wrappingTextBoxFlag xmlns="" xmlns:m="http://schemas.openxmlformats.org/officeDocument/2006/math" xmlns:a14="http://schemas.microsoft.com/office/drawing/2010/main" xmlns:ma14="http://schemas.microsoft.com/office/mac/drawingml/2011/main" val="1"/>
             </a:ext>
           </a:extLst>
         </p:spPr>
@@ -11177,7 +11177,7 @@
           </a:ln>
           <a:extLst>
             <a:ext uri="{C572A759-6A51-4108-AA02-DFA0A04FC94B}">
-              <ma14:wrappingTextBoxFlag xmlns:ma14="http://schemas.microsoft.com/office/mac/drawingml/2011/main" xmlns:a14="http://schemas.microsoft.com/office/drawing/2010/main" xmlns:m="http://schemas.openxmlformats.org/officeDocument/2006/math" xmlns="" val="1"/>
+              <ma14:wrappingTextBoxFlag xmlns="" xmlns:m="http://schemas.openxmlformats.org/officeDocument/2006/math" xmlns:a14="http://schemas.microsoft.com/office/drawing/2010/main" xmlns:ma14="http://schemas.microsoft.com/office/mac/drawingml/2011/main" val="1"/>
             </a:ext>
           </a:extLst>
         </p:spPr>
@@ -11229,7 +11229,7 @@
           </a:ln>
           <a:extLst>
             <a:ext uri="{C572A759-6A51-4108-AA02-DFA0A04FC94B}">
-              <ma14:wrappingTextBoxFlag xmlns:ma14="http://schemas.microsoft.com/office/mac/drawingml/2011/main" xmlns:a14="http://schemas.microsoft.com/office/drawing/2010/main" xmlns:m="http://schemas.openxmlformats.org/officeDocument/2006/math" xmlns="" val="1"/>
+              <ma14:wrappingTextBoxFlag xmlns="" xmlns:m="http://schemas.openxmlformats.org/officeDocument/2006/math" xmlns:a14="http://schemas.microsoft.com/office/drawing/2010/main" xmlns:ma14="http://schemas.microsoft.com/office/mac/drawingml/2011/main" val="1"/>
             </a:ext>
           </a:extLst>
         </p:spPr>
@@ -11343,7 +11343,7 @@
           </a:ln>
           <a:extLst>
             <a:ext uri="{C572A759-6A51-4108-AA02-DFA0A04FC94B}">
-              <ma14:wrappingTextBoxFlag xmlns:ma14="http://schemas.microsoft.com/office/mac/drawingml/2011/main" xmlns:a14="http://schemas.microsoft.com/office/drawing/2010/main" xmlns:m="http://schemas.openxmlformats.org/officeDocument/2006/math" xmlns="" val="1"/>
+              <ma14:wrappingTextBoxFlag xmlns="" xmlns:m="http://schemas.openxmlformats.org/officeDocument/2006/math" xmlns:a14="http://schemas.microsoft.com/office/drawing/2010/main" xmlns:ma14="http://schemas.microsoft.com/office/mac/drawingml/2011/main" val="1"/>
             </a:ext>
           </a:extLst>
         </p:spPr>
@@ -11394,7 +11394,7 @@
           </a:ln>
           <a:extLst>
             <a:ext uri="{C572A759-6A51-4108-AA02-DFA0A04FC94B}">
-              <ma14:wrappingTextBoxFlag xmlns:ma14="http://schemas.microsoft.com/office/mac/drawingml/2011/main" xmlns:a14="http://schemas.microsoft.com/office/drawing/2010/main" xmlns:m="http://schemas.openxmlformats.org/officeDocument/2006/math" xmlns="" val="1"/>
+              <ma14:wrappingTextBoxFlag xmlns="" xmlns:m="http://schemas.openxmlformats.org/officeDocument/2006/math" xmlns:a14="http://schemas.microsoft.com/office/drawing/2010/main" xmlns:ma14="http://schemas.microsoft.com/office/mac/drawingml/2011/main" val="1"/>
             </a:ext>
           </a:extLst>
         </p:spPr>
@@ -11445,7 +11445,7 @@
           </a:ln>
           <a:extLst>
             <a:ext uri="{C572A759-6A51-4108-AA02-DFA0A04FC94B}">
-              <ma14:wrappingTextBoxFlag xmlns:ma14="http://schemas.microsoft.com/office/mac/drawingml/2011/main" xmlns:a14="http://schemas.microsoft.com/office/drawing/2010/main" xmlns:m="http://schemas.openxmlformats.org/officeDocument/2006/math" xmlns="" val="1"/>
+              <ma14:wrappingTextBoxFlag xmlns="" xmlns:m="http://schemas.openxmlformats.org/officeDocument/2006/math" xmlns:a14="http://schemas.microsoft.com/office/drawing/2010/main" xmlns:ma14="http://schemas.microsoft.com/office/mac/drawingml/2011/main" val="1"/>
             </a:ext>
           </a:extLst>
         </p:spPr>
@@ -11825,7 +11825,7 @@
           </a:ln>
           <a:extLst>
             <a:ext uri="{C572A759-6A51-4108-AA02-DFA0A04FC94B}">
-              <ma14:wrappingTextBoxFlag xmlns:ma14="http://schemas.microsoft.com/office/mac/drawingml/2011/main" xmlns:a14="http://schemas.microsoft.com/office/drawing/2010/main" xmlns:m="http://schemas.openxmlformats.org/officeDocument/2006/math" xmlns="" val="1"/>
+              <ma14:wrappingTextBoxFlag xmlns="" xmlns:m="http://schemas.openxmlformats.org/officeDocument/2006/math" xmlns:a14="http://schemas.microsoft.com/office/drawing/2010/main" xmlns:ma14="http://schemas.microsoft.com/office/mac/drawingml/2011/main" val="1"/>
             </a:ext>
           </a:extLst>
         </p:spPr>
@@ -12063,7 +12063,7 @@
           </a:ln>
           <a:extLst>
             <a:ext uri="{C572A759-6A51-4108-AA02-DFA0A04FC94B}">
-              <ma14:wrappingTextBoxFlag xmlns:ma14="http://schemas.microsoft.com/office/mac/drawingml/2011/main" xmlns:a14="http://schemas.microsoft.com/office/drawing/2010/main" xmlns:m="http://schemas.openxmlformats.org/officeDocument/2006/math" xmlns="" val="1"/>
+              <ma14:wrappingTextBoxFlag xmlns="" xmlns:m="http://schemas.openxmlformats.org/officeDocument/2006/math" xmlns:a14="http://schemas.microsoft.com/office/drawing/2010/main" xmlns:ma14="http://schemas.microsoft.com/office/mac/drawingml/2011/main" val="1"/>
             </a:ext>
           </a:extLst>
         </p:spPr>
@@ -12444,7 +12444,7 @@
           </a:ln>
           <a:extLst>
             <a:ext uri="{C572A759-6A51-4108-AA02-DFA0A04FC94B}">
-              <ma14:wrappingTextBoxFlag xmlns:ma14="http://schemas.microsoft.com/office/mac/drawingml/2011/main" xmlns:a14="http://schemas.microsoft.com/office/drawing/2010/main" xmlns:m="http://schemas.openxmlformats.org/officeDocument/2006/math" xmlns="" val="1"/>
+              <ma14:wrappingTextBoxFlag xmlns="" xmlns:m="http://schemas.openxmlformats.org/officeDocument/2006/math" xmlns:a14="http://schemas.microsoft.com/office/drawing/2010/main" xmlns:ma14="http://schemas.microsoft.com/office/mac/drawingml/2011/main" val="1"/>
             </a:ext>
           </a:extLst>
         </p:spPr>
@@ -12486,7 +12486,7 @@
           </a:ln>
           <a:extLst>
             <a:ext uri="{C572A759-6A51-4108-AA02-DFA0A04FC94B}">
-              <ma14:wrappingTextBoxFlag xmlns:ma14="http://schemas.microsoft.com/office/mac/drawingml/2011/main" xmlns:a14="http://schemas.microsoft.com/office/drawing/2010/main" xmlns:m="http://schemas.openxmlformats.org/officeDocument/2006/math" xmlns="" val="1"/>
+              <ma14:wrappingTextBoxFlag xmlns="" xmlns:m="http://schemas.openxmlformats.org/officeDocument/2006/math" xmlns:a14="http://schemas.microsoft.com/office/drawing/2010/main" xmlns:ma14="http://schemas.microsoft.com/office/mac/drawingml/2011/main" val="1"/>
             </a:ext>
           </a:extLst>
         </p:spPr>
@@ -12528,7 +12528,7 @@
           </a:ln>
           <a:extLst>
             <a:ext uri="{C572A759-6A51-4108-AA02-DFA0A04FC94B}">
-              <ma14:wrappingTextBoxFlag xmlns:ma14="http://schemas.microsoft.com/office/mac/drawingml/2011/main" xmlns:a14="http://schemas.microsoft.com/office/drawing/2010/main" xmlns:m="http://schemas.openxmlformats.org/officeDocument/2006/math" xmlns="" val="1"/>
+              <ma14:wrappingTextBoxFlag xmlns="" xmlns:m="http://schemas.openxmlformats.org/officeDocument/2006/math" xmlns:a14="http://schemas.microsoft.com/office/drawing/2010/main" xmlns:ma14="http://schemas.microsoft.com/office/mac/drawingml/2011/main" val="1"/>
             </a:ext>
           </a:extLst>
         </p:spPr>
@@ -12570,7 +12570,7 @@
           </a:ln>
           <a:extLst>
             <a:ext uri="{C572A759-6A51-4108-AA02-DFA0A04FC94B}">
-              <ma14:wrappingTextBoxFlag xmlns:ma14="http://schemas.microsoft.com/office/mac/drawingml/2011/main" xmlns:a14="http://schemas.microsoft.com/office/drawing/2010/main" xmlns:m="http://schemas.openxmlformats.org/officeDocument/2006/math" xmlns="" val="1"/>
+              <ma14:wrappingTextBoxFlag xmlns="" xmlns:m="http://schemas.openxmlformats.org/officeDocument/2006/math" xmlns:a14="http://schemas.microsoft.com/office/drawing/2010/main" xmlns:ma14="http://schemas.microsoft.com/office/mac/drawingml/2011/main" val="1"/>
             </a:ext>
           </a:extLst>
         </p:spPr>
@@ -12884,7 +12884,7 @@
           </a:ln>
           <a:extLst>
             <a:ext uri="{C572A759-6A51-4108-AA02-DFA0A04FC94B}">
-              <ma14:wrappingTextBoxFlag xmlns:ma14="http://schemas.microsoft.com/office/mac/drawingml/2011/main" xmlns:a14="http://schemas.microsoft.com/office/drawing/2010/main" xmlns:m="http://schemas.openxmlformats.org/officeDocument/2006/math" xmlns="" val="1"/>
+              <ma14:wrappingTextBoxFlag xmlns="" xmlns:m="http://schemas.openxmlformats.org/officeDocument/2006/math" xmlns:a14="http://schemas.microsoft.com/office/drawing/2010/main" xmlns:ma14="http://schemas.microsoft.com/office/mac/drawingml/2011/main" val="1"/>
             </a:ext>
           </a:extLst>
         </p:spPr>
@@ -13187,7 +13187,7 @@
           </a:ln>
           <a:extLst>
             <a:ext uri="{C572A759-6A51-4108-AA02-DFA0A04FC94B}">
-              <ma14:wrappingTextBoxFlag xmlns:ma14="http://schemas.microsoft.com/office/mac/drawingml/2011/main" xmlns:a14="http://schemas.microsoft.com/office/drawing/2010/main" xmlns:m="http://schemas.openxmlformats.org/officeDocument/2006/math" xmlns="" val="1"/>
+              <ma14:wrappingTextBoxFlag xmlns="" xmlns:m="http://schemas.openxmlformats.org/officeDocument/2006/math" xmlns:a14="http://schemas.microsoft.com/office/drawing/2010/main" xmlns:ma14="http://schemas.microsoft.com/office/mac/drawingml/2011/main" val="1"/>
             </a:ext>
           </a:extLst>
         </p:spPr>
@@ -13230,7 +13230,7 @@
           </a:ln>
           <a:extLst>
             <a:ext uri="{C572A759-6A51-4108-AA02-DFA0A04FC94B}">
-              <ma14:wrappingTextBoxFlag xmlns:ma14="http://schemas.microsoft.com/office/mac/drawingml/2011/main" xmlns:a14="http://schemas.microsoft.com/office/drawing/2010/main" xmlns:m="http://schemas.openxmlformats.org/officeDocument/2006/math" xmlns="" val="1"/>
+              <ma14:wrappingTextBoxFlag xmlns="" xmlns:m="http://schemas.openxmlformats.org/officeDocument/2006/math" xmlns:a14="http://schemas.microsoft.com/office/drawing/2010/main" xmlns:ma14="http://schemas.microsoft.com/office/mac/drawingml/2011/main" val="1"/>
             </a:ext>
           </a:extLst>
         </p:spPr>
@@ -14714,7 +14714,7 @@
           </a:ln>
           <a:extLst>
             <a:ext uri="{C572A759-6A51-4108-AA02-DFA0A04FC94B}">
-              <ma14:wrappingTextBoxFlag xmlns:ma14="http://schemas.microsoft.com/office/mac/drawingml/2011/main" xmlns:a14="http://schemas.microsoft.com/office/drawing/2010/main" xmlns:m="http://schemas.openxmlformats.org/officeDocument/2006/math" xmlns="" val="1"/>
+              <ma14:wrappingTextBoxFlag xmlns="" xmlns:m="http://schemas.openxmlformats.org/officeDocument/2006/math" xmlns:a14="http://schemas.microsoft.com/office/drawing/2010/main" xmlns:ma14="http://schemas.microsoft.com/office/mac/drawingml/2011/main" val="1"/>
             </a:ext>
           </a:extLst>
         </p:spPr>
@@ -14762,7 +14762,7 @@
           </a:ln>
           <a:extLst>
             <a:ext uri="{C572A759-6A51-4108-AA02-DFA0A04FC94B}">
-              <ma14:wrappingTextBoxFlag xmlns:ma14="http://schemas.microsoft.com/office/mac/drawingml/2011/main" xmlns:a14="http://schemas.microsoft.com/office/drawing/2010/main" xmlns:m="http://schemas.openxmlformats.org/officeDocument/2006/math" xmlns="" val="1"/>
+              <ma14:wrappingTextBoxFlag xmlns="" xmlns:m="http://schemas.openxmlformats.org/officeDocument/2006/math" xmlns:a14="http://schemas.microsoft.com/office/drawing/2010/main" xmlns:ma14="http://schemas.microsoft.com/office/mac/drawingml/2011/main" val="1"/>
             </a:ext>
           </a:extLst>
         </p:spPr>
@@ -15188,7 +15188,7 @@
           </a:ln>
           <a:extLst>
             <a:ext uri="{C572A759-6A51-4108-AA02-DFA0A04FC94B}">
-              <ma14:wrappingTextBoxFlag xmlns:ma14="http://schemas.microsoft.com/office/mac/drawingml/2011/main" xmlns:a14="http://schemas.microsoft.com/office/drawing/2010/main" xmlns:m="http://schemas.openxmlformats.org/officeDocument/2006/math" xmlns="" val="1"/>
+              <ma14:wrappingTextBoxFlag xmlns="" xmlns:m="http://schemas.openxmlformats.org/officeDocument/2006/math" xmlns:a14="http://schemas.microsoft.com/office/drawing/2010/main" xmlns:ma14="http://schemas.microsoft.com/office/mac/drawingml/2011/main" val="1"/>
             </a:ext>
           </a:extLst>
         </p:spPr>
@@ -15310,7 +15310,7 @@
           </a:ln>
           <a:extLst>
             <a:ext uri="{C572A759-6A51-4108-AA02-DFA0A04FC94B}">
-              <ma14:wrappingTextBoxFlag xmlns:ma14="http://schemas.microsoft.com/office/mac/drawingml/2011/main" xmlns:a14="http://schemas.microsoft.com/office/drawing/2010/main" xmlns:m="http://schemas.openxmlformats.org/officeDocument/2006/math" xmlns="" val="1"/>
+              <ma14:wrappingTextBoxFlag xmlns="" xmlns:m="http://schemas.openxmlformats.org/officeDocument/2006/math" xmlns:a14="http://schemas.microsoft.com/office/drawing/2010/main" xmlns:ma14="http://schemas.microsoft.com/office/mac/drawingml/2011/main" val="1"/>
             </a:ext>
           </a:extLst>
         </p:spPr>
@@ -15365,7 +15365,7 @@
           </a:ln>
           <a:extLst>
             <a:ext uri="{C572A759-6A51-4108-AA02-DFA0A04FC94B}">
-              <ma14:wrappingTextBoxFlag xmlns:ma14="http://schemas.microsoft.com/office/mac/drawingml/2011/main" xmlns:a14="http://schemas.microsoft.com/office/drawing/2010/main" xmlns:m="http://schemas.openxmlformats.org/officeDocument/2006/math" xmlns="" val="1"/>
+              <ma14:wrappingTextBoxFlag xmlns="" xmlns:m="http://schemas.openxmlformats.org/officeDocument/2006/math" xmlns:a14="http://schemas.microsoft.com/office/drawing/2010/main" xmlns:ma14="http://schemas.microsoft.com/office/mac/drawingml/2011/main" val="1"/>
             </a:ext>
           </a:extLst>
         </p:spPr>
@@ -15494,7 +15494,7 @@
           </a:ln>
           <a:extLst>
             <a:ext uri="{C572A759-6A51-4108-AA02-DFA0A04FC94B}">
-              <ma14:wrappingTextBoxFlag xmlns:ma14="http://schemas.microsoft.com/office/mac/drawingml/2011/main" xmlns:a14="http://schemas.microsoft.com/office/drawing/2010/main" xmlns:m="http://schemas.openxmlformats.org/officeDocument/2006/math" xmlns="" val="1"/>
+              <ma14:wrappingTextBoxFlag xmlns="" xmlns:m="http://schemas.openxmlformats.org/officeDocument/2006/math" xmlns:a14="http://schemas.microsoft.com/office/drawing/2010/main" xmlns:ma14="http://schemas.microsoft.com/office/mac/drawingml/2011/main" val="1"/>
             </a:ext>
           </a:extLst>
         </p:spPr>
@@ -15549,7 +15549,7 @@
           </a:ln>
           <a:extLst>
             <a:ext uri="{C572A759-6A51-4108-AA02-DFA0A04FC94B}">
-              <ma14:wrappingTextBoxFlag xmlns:ma14="http://schemas.microsoft.com/office/mac/drawingml/2011/main" xmlns:a14="http://schemas.microsoft.com/office/drawing/2010/main" xmlns:m="http://schemas.openxmlformats.org/officeDocument/2006/math" xmlns="" val="1"/>
+              <ma14:wrappingTextBoxFlag xmlns="" xmlns:m="http://schemas.openxmlformats.org/officeDocument/2006/math" xmlns:a14="http://schemas.microsoft.com/office/drawing/2010/main" xmlns:ma14="http://schemas.microsoft.com/office/mac/drawingml/2011/main" val="1"/>
             </a:ext>
           </a:extLst>
         </p:spPr>
@@ -15678,7 +15678,7 @@
           </a:ln>
           <a:extLst>
             <a:ext uri="{C572A759-6A51-4108-AA02-DFA0A04FC94B}">
-              <ma14:wrappingTextBoxFlag xmlns:ma14="http://schemas.microsoft.com/office/mac/drawingml/2011/main" xmlns:a14="http://schemas.microsoft.com/office/drawing/2010/main" xmlns:m="http://schemas.openxmlformats.org/officeDocument/2006/math" xmlns="" val="1"/>
+              <ma14:wrappingTextBoxFlag xmlns="" xmlns:m="http://schemas.openxmlformats.org/officeDocument/2006/math" xmlns:a14="http://schemas.microsoft.com/office/drawing/2010/main" xmlns:ma14="http://schemas.microsoft.com/office/mac/drawingml/2011/main" val="1"/>
             </a:ext>
           </a:extLst>
         </p:spPr>
@@ -15733,7 +15733,7 @@
           </a:ln>
           <a:extLst>
             <a:ext uri="{C572A759-6A51-4108-AA02-DFA0A04FC94B}">
-              <ma14:wrappingTextBoxFlag xmlns:ma14="http://schemas.microsoft.com/office/mac/drawingml/2011/main" xmlns:a14="http://schemas.microsoft.com/office/drawing/2010/main" xmlns:m="http://schemas.openxmlformats.org/officeDocument/2006/math" xmlns="" val="1"/>
+              <ma14:wrappingTextBoxFlag xmlns="" xmlns:m="http://schemas.openxmlformats.org/officeDocument/2006/math" xmlns:a14="http://schemas.microsoft.com/office/drawing/2010/main" xmlns:ma14="http://schemas.microsoft.com/office/mac/drawingml/2011/main" val="1"/>
             </a:ext>
           </a:extLst>
         </p:spPr>
@@ -16762,7 +16762,7 @@
           </a:ln>
           <a:extLst>
             <a:ext uri="{C572A759-6A51-4108-AA02-DFA0A04FC94B}">
-              <ma14:wrappingTextBoxFlag xmlns:ma14="http://schemas.microsoft.com/office/mac/drawingml/2011/main" xmlns:a14="http://schemas.microsoft.com/office/drawing/2010/main" xmlns:m="http://schemas.openxmlformats.org/officeDocument/2006/math" xmlns="" val="1"/>
+              <ma14:wrappingTextBoxFlag xmlns="" xmlns:m="http://schemas.openxmlformats.org/officeDocument/2006/math" xmlns:a14="http://schemas.microsoft.com/office/drawing/2010/main" xmlns:ma14="http://schemas.microsoft.com/office/mac/drawingml/2011/main" val="1"/>
             </a:ext>
           </a:extLst>
         </p:spPr>
@@ -16805,7 +16805,7 @@
           </a:ln>
           <a:extLst>
             <a:ext uri="{C572A759-6A51-4108-AA02-DFA0A04FC94B}">
-              <ma14:wrappingTextBoxFlag xmlns:ma14="http://schemas.microsoft.com/office/mac/drawingml/2011/main" xmlns:a14="http://schemas.microsoft.com/office/drawing/2010/main" xmlns:m="http://schemas.openxmlformats.org/officeDocument/2006/math" xmlns="" val="1"/>
+              <ma14:wrappingTextBoxFlag xmlns="" xmlns:m="http://schemas.openxmlformats.org/officeDocument/2006/math" xmlns:a14="http://schemas.microsoft.com/office/drawing/2010/main" xmlns:ma14="http://schemas.microsoft.com/office/mac/drawingml/2011/main" val="1"/>
             </a:ext>
           </a:extLst>
         </p:spPr>
@@ -17094,7 +17094,7 @@
           </a:ln>
           <a:extLst>
             <a:ext uri="{C572A759-6A51-4108-AA02-DFA0A04FC94B}">
-              <ma14:wrappingTextBoxFlag xmlns:ma14="http://schemas.microsoft.com/office/mac/drawingml/2011/main" xmlns:a14="http://schemas.microsoft.com/office/drawing/2010/main" xmlns:m="http://schemas.openxmlformats.org/officeDocument/2006/math" xmlns="" val="1"/>
+              <ma14:wrappingTextBoxFlag xmlns="" xmlns:m="http://schemas.openxmlformats.org/officeDocument/2006/math" xmlns:a14="http://schemas.microsoft.com/office/drawing/2010/main" xmlns:ma14="http://schemas.microsoft.com/office/mac/drawingml/2011/main" val="1"/>
             </a:ext>
           </a:extLst>
         </p:spPr>
@@ -17136,7 +17136,7 @@
           </a:ln>
           <a:extLst>
             <a:ext uri="{C572A759-6A51-4108-AA02-DFA0A04FC94B}">
-              <ma14:wrappingTextBoxFlag xmlns:ma14="http://schemas.microsoft.com/office/mac/drawingml/2011/main" xmlns:a14="http://schemas.microsoft.com/office/drawing/2010/main" xmlns:m="http://schemas.openxmlformats.org/officeDocument/2006/math" xmlns="" val="1"/>
+              <ma14:wrappingTextBoxFlag xmlns="" xmlns:m="http://schemas.openxmlformats.org/officeDocument/2006/math" xmlns:a14="http://schemas.microsoft.com/office/drawing/2010/main" xmlns:ma14="http://schemas.microsoft.com/office/mac/drawingml/2011/main" val="1"/>
             </a:ext>
           </a:extLst>
         </p:spPr>
@@ -17178,7 +17178,7 @@
           </a:ln>
           <a:extLst>
             <a:ext uri="{C572A759-6A51-4108-AA02-DFA0A04FC94B}">
-              <ma14:wrappingTextBoxFlag xmlns:ma14="http://schemas.microsoft.com/office/mac/drawingml/2011/main" xmlns:a14="http://schemas.microsoft.com/office/drawing/2010/main" xmlns:m="http://schemas.openxmlformats.org/officeDocument/2006/math" xmlns="" val="1"/>
+              <ma14:wrappingTextBoxFlag xmlns="" xmlns:m="http://schemas.openxmlformats.org/officeDocument/2006/math" xmlns:a14="http://schemas.microsoft.com/office/drawing/2010/main" xmlns:ma14="http://schemas.microsoft.com/office/mac/drawingml/2011/main" val="1"/>
             </a:ext>
           </a:extLst>
         </p:spPr>
@@ -17220,7 +17220,7 @@
           </a:ln>
           <a:extLst>
             <a:ext uri="{C572A759-6A51-4108-AA02-DFA0A04FC94B}">
-              <ma14:wrappingTextBoxFlag xmlns:ma14="http://schemas.microsoft.com/office/mac/drawingml/2011/main" xmlns:a14="http://schemas.microsoft.com/office/drawing/2010/main" xmlns:m="http://schemas.openxmlformats.org/officeDocument/2006/math" xmlns="" val="1"/>
+              <ma14:wrappingTextBoxFlag xmlns="" xmlns:m="http://schemas.openxmlformats.org/officeDocument/2006/math" xmlns:a14="http://schemas.microsoft.com/office/drawing/2010/main" xmlns:ma14="http://schemas.microsoft.com/office/mac/drawingml/2011/main" val="1"/>
             </a:ext>
           </a:extLst>
         </p:spPr>
@@ -17488,7 +17488,7 @@
           </a:ln>
           <a:extLst>
             <a:ext uri="{C572A759-6A51-4108-AA02-DFA0A04FC94B}">
-              <ma14:wrappingTextBoxFlag xmlns:ma14="http://schemas.microsoft.com/office/mac/drawingml/2011/main" xmlns:a14="http://schemas.microsoft.com/office/drawing/2010/main" xmlns:m="http://schemas.openxmlformats.org/officeDocument/2006/math" xmlns="" val="1"/>
+              <ma14:wrappingTextBoxFlag xmlns="" xmlns:m="http://schemas.openxmlformats.org/officeDocument/2006/math" xmlns:a14="http://schemas.microsoft.com/office/drawing/2010/main" xmlns:ma14="http://schemas.microsoft.com/office/mac/drawingml/2011/main" val="1"/>
             </a:ext>
           </a:extLst>
         </p:spPr>
@@ -18412,7 +18412,7 @@
           </a:ln>
           <a:extLst>
             <a:ext uri="{C572A759-6A51-4108-AA02-DFA0A04FC94B}">
-              <ma14:wrappingTextBoxFlag xmlns:ma14="http://schemas.microsoft.com/office/mac/drawingml/2011/main" xmlns:a14="http://schemas.microsoft.com/office/drawing/2010/main" xmlns:m="http://schemas.openxmlformats.org/officeDocument/2006/math" xmlns="" val="1"/>
+              <ma14:wrappingTextBoxFlag xmlns="" xmlns:m="http://schemas.openxmlformats.org/officeDocument/2006/math" xmlns:a14="http://schemas.microsoft.com/office/drawing/2010/main" xmlns:ma14="http://schemas.microsoft.com/office/mac/drawingml/2011/main" val="1"/>
             </a:ext>
           </a:extLst>
         </p:spPr>
@@ -18928,7 +18928,7 @@
           </a:ln>
           <a:extLst>
             <a:ext uri="{C572A759-6A51-4108-AA02-DFA0A04FC94B}">
-              <ma14:wrappingTextBoxFlag xmlns:ma14="http://schemas.microsoft.com/office/mac/drawingml/2011/main" xmlns:a14="http://schemas.microsoft.com/office/drawing/2010/main" xmlns:m="http://schemas.openxmlformats.org/officeDocument/2006/math" xmlns="" val="1"/>
+              <ma14:wrappingTextBoxFlag xmlns="" xmlns:m="http://schemas.openxmlformats.org/officeDocument/2006/math" xmlns:a14="http://schemas.microsoft.com/office/drawing/2010/main" xmlns:ma14="http://schemas.microsoft.com/office/mac/drawingml/2011/main" val="1"/>
             </a:ext>
           </a:extLst>
         </p:spPr>
@@ -19570,7 +19570,7 @@
           </a:ln>
           <a:extLst>
             <a:ext uri="{C572A759-6A51-4108-AA02-DFA0A04FC94B}">
-              <ma14:wrappingTextBoxFlag xmlns:ma14="http://schemas.microsoft.com/office/mac/drawingml/2011/main" xmlns:a14="http://schemas.microsoft.com/office/drawing/2010/main" xmlns:m="http://schemas.openxmlformats.org/officeDocument/2006/math" xmlns="" val="1"/>
+              <ma14:wrappingTextBoxFlag xmlns="" xmlns:m="http://schemas.openxmlformats.org/officeDocument/2006/math" xmlns:a14="http://schemas.microsoft.com/office/drawing/2010/main" xmlns:ma14="http://schemas.microsoft.com/office/mac/drawingml/2011/main" val="1"/>
             </a:ext>
           </a:extLst>
         </p:spPr>
@@ -19632,7 +19632,7 @@
           </a:ln>
           <a:extLst>
             <a:ext uri="{C572A759-6A51-4108-AA02-DFA0A04FC94B}">
-              <ma14:wrappingTextBoxFlag xmlns:ma14="http://schemas.microsoft.com/office/mac/drawingml/2011/main" xmlns:a14="http://schemas.microsoft.com/office/drawing/2010/main" xmlns:m="http://schemas.openxmlformats.org/officeDocument/2006/math" xmlns="" val="1"/>
+              <ma14:wrappingTextBoxFlag xmlns="" xmlns:m="http://schemas.openxmlformats.org/officeDocument/2006/math" xmlns:a14="http://schemas.microsoft.com/office/drawing/2010/main" xmlns:ma14="http://schemas.microsoft.com/office/mac/drawingml/2011/main" val="1"/>
             </a:ext>
           </a:extLst>
         </p:spPr>
@@ -21253,7 +21253,7 @@
           </a:ln>
           <a:extLst>
             <a:ext uri="{C572A759-6A51-4108-AA02-DFA0A04FC94B}">
-              <ma14:wrappingTextBoxFlag xmlns:ma14="http://schemas.microsoft.com/office/mac/drawingml/2011/main" xmlns:a14="http://schemas.microsoft.com/office/drawing/2010/main" xmlns:m="http://schemas.openxmlformats.org/officeDocument/2006/math" xmlns="" val="1"/>
+              <ma14:wrappingTextBoxFlag xmlns="" xmlns:m="http://schemas.openxmlformats.org/officeDocument/2006/math" xmlns:a14="http://schemas.microsoft.com/office/drawing/2010/main" xmlns:ma14="http://schemas.microsoft.com/office/mac/drawingml/2011/main" val="1"/>
             </a:ext>
           </a:extLst>
         </p:spPr>
@@ -21637,7 +21637,7 @@
           </a:ln>
           <a:extLst>
             <a:ext uri="{C572A759-6A51-4108-AA02-DFA0A04FC94B}">
-              <ma14:wrappingTextBoxFlag xmlns:ma14="http://schemas.microsoft.com/office/mac/drawingml/2011/main" xmlns:a14="http://schemas.microsoft.com/office/drawing/2010/main" xmlns:m="http://schemas.openxmlformats.org/officeDocument/2006/math" xmlns="" val="1"/>
+              <ma14:wrappingTextBoxFlag xmlns="" xmlns:m="http://schemas.openxmlformats.org/officeDocument/2006/math" xmlns:a14="http://schemas.microsoft.com/office/drawing/2010/main" xmlns:ma14="http://schemas.microsoft.com/office/mac/drawingml/2011/main" val="1"/>
             </a:ext>
           </a:extLst>
         </p:spPr>
@@ -21755,7 +21755,7 @@
           </a:ln>
           <a:extLst>
             <a:ext uri="{C572A759-6A51-4108-AA02-DFA0A04FC94B}">
-              <ma14:wrappingTextBoxFlag xmlns:ma14="http://schemas.microsoft.com/office/mac/drawingml/2011/main" xmlns:a14="http://schemas.microsoft.com/office/drawing/2010/main" xmlns:m="http://schemas.openxmlformats.org/officeDocument/2006/math" xmlns="" val="1"/>
+              <ma14:wrappingTextBoxFlag xmlns="" xmlns:m="http://schemas.openxmlformats.org/officeDocument/2006/math" xmlns:a14="http://schemas.microsoft.com/office/drawing/2010/main" xmlns:ma14="http://schemas.microsoft.com/office/mac/drawingml/2011/main" val="1"/>
             </a:ext>
           </a:extLst>
         </p:spPr>
@@ -22306,7 +22306,7 @@
           </a:ln>
           <a:extLst>
             <a:ext uri="{C572A759-6A51-4108-AA02-DFA0A04FC94B}">
-              <ma14:wrappingTextBoxFlag xmlns:ma14="http://schemas.microsoft.com/office/mac/drawingml/2011/main" xmlns:a14="http://schemas.microsoft.com/office/drawing/2010/main" xmlns:m="http://schemas.openxmlformats.org/officeDocument/2006/math" xmlns="" val="1"/>
+              <ma14:wrappingTextBoxFlag xmlns="" xmlns:m="http://schemas.openxmlformats.org/officeDocument/2006/math" xmlns:a14="http://schemas.microsoft.com/office/drawing/2010/main" xmlns:ma14="http://schemas.microsoft.com/office/mac/drawingml/2011/main" val="1"/>
             </a:ext>
           </a:extLst>
         </p:spPr>
@@ -22370,7 +22370,7 @@
           </a:ln>
           <a:extLst>
             <a:ext uri="{C572A759-6A51-4108-AA02-DFA0A04FC94B}">
-              <ma14:wrappingTextBoxFlag xmlns:ma14="http://schemas.microsoft.com/office/mac/drawingml/2011/main" xmlns:a14="http://schemas.microsoft.com/office/drawing/2010/main" xmlns:m="http://schemas.openxmlformats.org/officeDocument/2006/math" xmlns="" val="1"/>
+              <ma14:wrappingTextBoxFlag xmlns="" xmlns:m="http://schemas.openxmlformats.org/officeDocument/2006/math" xmlns:a14="http://schemas.microsoft.com/office/drawing/2010/main" xmlns:ma14="http://schemas.microsoft.com/office/mac/drawingml/2011/main" val="1"/>
             </a:ext>
           </a:extLst>
         </p:spPr>
@@ -22406,7 +22406,7 @@
           </a:ln>
           <a:extLst>
             <a:ext uri="{C572A759-6A51-4108-AA02-DFA0A04FC94B}">
-              <ma14:wrappingTextBoxFlag xmlns:ma14="http://schemas.microsoft.com/office/mac/drawingml/2011/main" xmlns:a14="http://schemas.microsoft.com/office/drawing/2010/main" xmlns:m="http://schemas.openxmlformats.org/officeDocument/2006/math" xmlns="" val="1"/>
+              <ma14:wrappingTextBoxFlag xmlns="" xmlns:m="http://schemas.openxmlformats.org/officeDocument/2006/math" xmlns:a14="http://schemas.microsoft.com/office/drawing/2010/main" xmlns:ma14="http://schemas.microsoft.com/office/mac/drawingml/2011/main" val="1"/>
             </a:ext>
           </a:extLst>
         </p:spPr>
@@ -22451,7 +22451,7 @@
           </a:ln>
           <a:extLst>
             <a:ext uri="{C572A759-6A51-4108-AA02-DFA0A04FC94B}">
-              <ma14:wrappingTextBoxFlag xmlns:ma14="http://schemas.microsoft.com/office/mac/drawingml/2011/main" xmlns:a14="http://schemas.microsoft.com/office/drawing/2010/main" xmlns:m="http://schemas.openxmlformats.org/officeDocument/2006/math" xmlns="" val="1"/>
+              <ma14:wrappingTextBoxFlag xmlns="" xmlns:m="http://schemas.openxmlformats.org/officeDocument/2006/math" xmlns:a14="http://schemas.microsoft.com/office/drawing/2010/main" xmlns:ma14="http://schemas.microsoft.com/office/mac/drawingml/2011/main" val="1"/>
             </a:ext>
           </a:extLst>
         </p:spPr>
@@ -22502,7 +22502,7 @@
           </a:ln>
           <a:extLst>
             <a:ext uri="{C572A759-6A51-4108-AA02-DFA0A04FC94B}">
-              <ma14:wrappingTextBoxFlag xmlns:ma14="http://schemas.microsoft.com/office/mac/drawingml/2011/main" xmlns:a14="http://schemas.microsoft.com/office/drawing/2010/main" xmlns:m="http://schemas.openxmlformats.org/officeDocument/2006/math" xmlns="" val="1"/>
+              <ma14:wrappingTextBoxFlag xmlns="" xmlns:m="http://schemas.openxmlformats.org/officeDocument/2006/math" xmlns:a14="http://schemas.microsoft.com/office/drawing/2010/main" xmlns:ma14="http://schemas.microsoft.com/office/mac/drawingml/2011/main" val="1"/>
             </a:ext>
           </a:extLst>
         </p:spPr>
@@ -22552,7 +22552,7 @@
           </a:ln>
           <a:extLst>
             <a:ext uri="{C572A759-6A51-4108-AA02-DFA0A04FC94B}">
-              <ma14:wrappingTextBoxFlag xmlns:ma14="http://schemas.microsoft.com/office/mac/drawingml/2011/main" xmlns:a14="http://schemas.microsoft.com/office/drawing/2010/main" xmlns:m="http://schemas.openxmlformats.org/officeDocument/2006/math" xmlns="" val="1"/>
+              <ma14:wrappingTextBoxFlag xmlns="" xmlns:m="http://schemas.openxmlformats.org/officeDocument/2006/math" xmlns:a14="http://schemas.microsoft.com/office/drawing/2010/main" xmlns:ma14="http://schemas.microsoft.com/office/mac/drawingml/2011/main" val="1"/>
             </a:ext>
           </a:extLst>
         </p:spPr>
@@ -22908,7 +22908,7 @@
           </a:ln>
           <a:extLst>
             <a:ext uri="{C572A759-6A51-4108-AA02-DFA0A04FC94B}">
-              <ma14:wrappingTextBoxFlag xmlns:ma14="http://schemas.microsoft.com/office/mac/drawingml/2011/main" xmlns:a14="http://schemas.microsoft.com/office/drawing/2010/main" xmlns:m="http://schemas.openxmlformats.org/officeDocument/2006/math" xmlns="" val="1"/>
+              <ma14:wrappingTextBoxFlag xmlns="" xmlns:m="http://schemas.openxmlformats.org/officeDocument/2006/math" xmlns:a14="http://schemas.microsoft.com/office/drawing/2010/main" xmlns:ma14="http://schemas.microsoft.com/office/mac/drawingml/2011/main" val="1"/>
             </a:ext>
           </a:extLst>
         </p:spPr>
@@ -22957,7 +22957,7 @@
           </a:ln>
           <a:extLst>
             <a:ext uri="{C572A759-6A51-4108-AA02-DFA0A04FC94B}">
-              <ma14:wrappingTextBoxFlag xmlns:ma14="http://schemas.microsoft.com/office/mac/drawingml/2011/main" xmlns:a14="http://schemas.microsoft.com/office/drawing/2010/main" xmlns:m="http://schemas.openxmlformats.org/officeDocument/2006/math" xmlns="" val="1"/>
+              <ma14:wrappingTextBoxFlag xmlns="" xmlns:m="http://schemas.openxmlformats.org/officeDocument/2006/math" xmlns:a14="http://schemas.microsoft.com/office/drawing/2010/main" xmlns:ma14="http://schemas.microsoft.com/office/mac/drawingml/2011/main" val="1"/>
             </a:ext>
           </a:extLst>
         </p:spPr>
@@ -23048,7 +23048,7 @@
           </a:ln>
           <a:extLst>
             <a:ext uri="{C572A759-6A51-4108-AA02-DFA0A04FC94B}">
-              <ma14:wrappingTextBoxFlag xmlns:ma14="http://schemas.microsoft.com/office/mac/drawingml/2011/main" xmlns:a14="http://schemas.microsoft.com/office/drawing/2010/main" xmlns:m="http://schemas.openxmlformats.org/officeDocument/2006/math" xmlns="" val="1"/>
+              <ma14:wrappingTextBoxFlag xmlns="" xmlns:m="http://schemas.openxmlformats.org/officeDocument/2006/math" xmlns:a14="http://schemas.microsoft.com/office/drawing/2010/main" xmlns:ma14="http://schemas.microsoft.com/office/mac/drawingml/2011/main" val="1"/>
             </a:ext>
           </a:extLst>
         </p:spPr>
@@ -23178,7 +23178,7 @@
           </a:ln>
           <a:extLst>
             <a:ext uri="{C572A759-6A51-4108-AA02-DFA0A04FC94B}">
-              <ma14:wrappingTextBoxFlag xmlns:ma14="http://schemas.microsoft.com/office/mac/drawingml/2011/main" xmlns:a14="http://schemas.microsoft.com/office/drawing/2010/main" xmlns:m="http://schemas.openxmlformats.org/officeDocument/2006/math" xmlns="" val="1"/>
+              <ma14:wrappingTextBoxFlag xmlns="" xmlns:m="http://schemas.openxmlformats.org/officeDocument/2006/math" xmlns:a14="http://schemas.microsoft.com/office/drawing/2010/main" xmlns:ma14="http://schemas.microsoft.com/office/mac/drawingml/2011/main" val="1"/>
             </a:ext>
           </a:extLst>
         </p:spPr>
@@ -23391,7 +23391,33 @@
                   </a:solidFill>
                 </a:uFill>
               </a:rPr>
-              <a:t>isreal</a:t>
+              <a:t>is</a:t>
+            </a:r>
+            <a:r>
+              <a:rPr lang="en-US" sz="2400" dirty="0" err="1">
+                <a:solidFill>
+                  <a:srgbClr val="0085CC"/>
+                </a:solidFill>
+                <a:uFill>
+                  <a:solidFill>
+                    <a:srgbClr val="0085CC"/>
+                  </a:solidFill>
+                </a:uFill>
+              </a:rPr>
+              <a:t>_</a:t>
+            </a:r>
+            <a:r>
+              <a:rPr sz="2400" dirty="0" err="1">
+                <a:solidFill>
+                  <a:srgbClr val="0085CC"/>
+                </a:solidFill>
+                <a:uFill>
+                  <a:solidFill>
+                    <a:srgbClr val="0085CC"/>
+                  </a:solidFill>
+                </a:uFill>
+              </a:rPr>
+              <a:t>real</a:t>
             </a:r>
             <a:r>
               <a:rPr lang="en-GB" altLang="ja-JP" sz="2400" dirty="0"/>
@@ -23399,7 +23425,15 @@
             </a:r>
             <a:r>
               <a:rPr lang="en-GB" altLang="ja-JP" sz="2400" dirty="0" err="1"/>
-              <a:t>r.isreal</a:t>
+              <a:t>r</a:t>
+            </a:r>
+            <a:r>
+              <a:rPr lang="en-GB" altLang="ja-JP" sz="2400" err="1"/>
+              <a:t>.</a:t>
+            </a:r>
+            <a:r>
+              <a:rPr lang="en-GB" altLang="ja-JP" sz="2400"/>
+              <a:t>is_real</a:t>
             </a:r>
             <a:r>
               <a:rPr lang="en-GB" altLang="ja-JP" sz="2400" dirty="0"/>
@@ -24323,7 +24357,7 @@
           </a:ln>
           <a:extLst>
             <a:ext uri="{C572A759-6A51-4108-AA02-DFA0A04FC94B}">
-              <ma14:wrappingTextBoxFlag xmlns:ma14="http://schemas.microsoft.com/office/mac/drawingml/2011/main" xmlns:a14="http://schemas.microsoft.com/office/drawing/2010/main" xmlns:m="http://schemas.openxmlformats.org/officeDocument/2006/math" xmlns="" val="1"/>
+              <ma14:wrappingTextBoxFlag xmlns="" xmlns:m="http://schemas.openxmlformats.org/officeDocument/2006/math" xmlns:a14="http://schemas.microsoft.com/office/drawing/2010/main" xmlns:ma14="http://schemas.microsoft.com/office/mac/drawingml/2011/main" val="1"/>
             </a:ext>
           </a:extLst>
         </p:spPr>
@@ -24371,7 +24405,7 @@
           </a:ln>
           <a:extLst>
             <a:ext uri="{C572A759-6A51-4108-AA02-DFA0A04FC94B}">
-              <ma14:wrappingTextBoxFlag xmlns:ma14="http://schemas.microsoft.com/office/mac/drawingml/2011/main" xmlns:a14="http://schemas.microsoft.com/office/drawing/2010/main" xmlns:m="http://schemas.openxmlformats.org/officeDocument/2006/math" xmlns="" val="1"/>
+              <ma14:wrappingTextBoxFlag xmlns="" xmlns:m="http://schemas.openxmlformats.org/officeDocument/2006/math" xmlns:a14="http://schemas.microsoft.com/office/drawing/2010/main" xmlns:ma14="http://schemas.microsoft.com/office/mac/drawingml/2011/main" val="1"/>
             </a:ext>
           </a:extLst>
         </p:spPr>
@@ -24419,7 +24453,7 @@
           </a:ln>
           <a:extLst>
             <a:ext uri="{C572A759-6A51-4108-AA02-DFA0A04FC94B}">
-              <ma14:wrappingTextBoxFlag xmlns:ma14="http://schemas.microsoft.com/office/mac/drawingml/2011/main" xmlns:a14="http://schemas.microsoft.com/office/drawing/2010/main" xmlns:m="http://schemas.openxmlformats.org/officeDocument/2006/math" xmlns="" val="1"/>
+              <ma14:wrappingTextBoxFlag xmlns="" xmlns:m="http://schemas.openxmlformats.org/officeDocument/2006/math" xmlns:a14="http://schemas.microsoft.com/office/drawing/2010/main" xmlns:ma14="http://schemas.microsoft.com/office/mac/drawingml/2011/main" val="1"/>
             </a:ext>
           </a:extLst>
         </p:spPr>
@@ -24699,7 +24733,7 @@
           </a:ln>
           <a:extLst>
             <a:ext uri="{C572A759-6A51-4108-AA02-DFA0A04FC94B}">
-              <ma14:wrappingTextBoxFlag xmlns:ma14="http://schemas.microsoft.com/office/mac/drawingml/2011/main" xmlns:a14="http://schemas.microsoft.com/office/drawing/2010/main" xmlns:m="http://schemas.openxmlformats.org/officeDocument/2006/math" xmlns="" val="1"/>
+              <ma14:wrappingTextBoxFlag xmlns="" xmlns:m="http://schemas.openxmlformats.org/officeDocument/2006/math" xmlns:a14="http://schemas.microsoft.com/office/drawing/2010/main" xmlns:ma14="http://schemas.microsoft.com/office/mac/drawingml/2011/main" val="1"/>
             </a:ext>
           </a:extLst>
         </p:spPr>
@@ -26722,7 +26756,7 @@
           </a:ln>
           <a:extLst>
             <a:ext uri="{C572A759-6A51-4108-AA02-DFA0A04FC94B}">
-              <ma14:wrappingTextBoxFlag xmlns:ma14="http://schemas.microsoft.com/office/mac/drawingml/2011/main" xmlns:a14="http://schemas.microsoft.com/office/drawing/2010/main" xmlns:m="http://schemas.openxmlformats.org/officeDocument/2006/math" xmlns="" val="1"/>
+              <ma14:wrappingTextBoxFlag xmlns="" xmlns:m="http://schemas.openxmlformats.org/officeDocument/2006/math" xmlns:a14="http://schemas.microsoft.com/office/drawing/2010/main" xmlns:ma14="http://schemas.microsoft.com/office/mac/drawingml/2011/main" val="1"/>
             </a:ext>
           </a:extLst>
         </p:spPr>
@@ -26787,7 +26821,7 @@
           </a:ln>
           <a:extLst>
             <a:ext uri="{C572A759-6A51-4108-AA02-DFA0A04FC94B}">
-              <ma14:wrappingTextBoxFlag xmlns:ma14="http://schemas.microsoft.com/office/mac/drawingml/2011/main" xmlns:a14="http://schemas.microsoft.com/office/drawing/2010/main" xmlns:m="http://schemas.openxmlformats.org/officeDocument/2006/math" xmlns="" val="1"/>
+              <ma14:wrappingTextBoxFlag xmlns="" xmlns:m="http://schemas.openxmlformats.org/officeDocument/2006/math" xmlns:a14="http://schemas.microsoft.com/office/drawing/2010/main" xmlns:ma14="http://schemas.microsoft.com/office/mac/drawingml/2011/main" val="1"/>
             </a:ext>
           </a:extLst>
         </p:spPr>
@@ -26843,7 +26877,7 @@
           </a:ln>
           <a:extLst>
             <a:ext uri="{C572A759-6A51-4108-AA02-DFA0A04FC94B}">
-              <ma14:wrappingTextBoxFlag xmlns:ma14="http://schemas.microsoft.com/office/mac/drawingml/2011/main" xmlns:a14="http://schemas.microsoft.com/office/drawing/2010/main" xmlns:m="http://schemas.openxmlformats.org/officeDocument/2006/math" xmlns="" val="1"/>
+              <ma14:wrappingTextBoxFlag xmlns="" xmlns:m="http://schemas.openxmlformats.org/officeDocument/2006/math" xmlns:a14="http://schemas.microsoft.com/office/drawing/2010/main" xmlns:ma14="http://schemas.microsoft.com/office/mac/drawingml/2011/main" val="1"/>
             </a:ext>
           </a:extLst>
         </p:spPr>
@@ -26921,7 +26955,7 @@
           </a:ln>
           <a:extLst>
             <a:ext uri="{C572A759-6A51-4108-AA02-DFA0A04FC94B}">
-              <ma14:wrappingTextBoxFlag xmlns:ma14="http://schemas.microsoft.com/office/mac/drawingml/2011/main" xmlns:a14="http://schemas.microsoft.com/office/drawing/2010/main" xmlns:m="http://schemas.openxmlformats.org/officeDocument/2006/math" xmlns="" val="1"/>
+              <ma14:wrappingTextBoxFlag xmlns="" xmlns:m="http://schemas.openxmlformats.org/officeDocument/2006/math" xmlns:a14="http://schemas.microsoft.com/office/drawing/2010/main" xmlns:ma14="http://schemas.microsoft.com/office/mac/drawingml/2011/main" val="1"/>
             </a:ext>
           </a:extLst>
         </p:spPr>
@@ -26983,7 +27017,7 @@
           </a:ln>
           <a:extLst>
             <a:ext uri="{C572A759-6A51-4108-AA02-DFA0A04FC94B}">
-              <ma14:wrappingTextBoxFlag xmlns:ma14="http://schemas.microsoft.com/office/mac/drawingml/2011/main" xmlns:a14="http://schemas.microsoft.com/office/drawing/2010/main" xmlns:m="http://schemas.openxmlformats.org/officeDocument/2006/math" xmlns="" val="1"/>
+              <ma14:wrappingTextBoxFlag xmlns="" xmlns:m="http://schemas.openxmlformats.org/officeDocument/2006/math" xmlns:a14="http://schemas.microsoft.com/office/drawing/2010/main" xmlns:ma14="http://schemas.microsoft.com/office/mac/drawingml/2011/main" val="1"/>
             </a:ext>
           </a:extLst>
         </p:spPr>
@@ -27045,7 +27079,7 @@
           </a:ln>
           <a:extLst>
             <a:ext uri="{C572A759-6A51-4108-AA02-DFA0A04FC94B}">
-              <ma14:wrappingTextBoxFlag xmlns:ma14="http://schemas.microsoft.com/office/mac/drawingml/2011/main" xmlns:a14="http://schemas.microsoft.com/office/drawing/2010/main" xmlns:m="http://schemas.openxmlformats.org/officeDocument/2006/math" xmlns="" val="1"/>
+              <ma14:wrappingTextBoxFlag xmlns="" xmlns:m="http://schemas.openxmlformats.org/officeDocument/2006/math" xmlns:a14="http://schemas.microsoft.com/office/drawing/2010/main" xmlns:ma14="http://schemas.microsoft.com/office/mac/drawingml/2011/main" val="1"/>
             </a:ext>
           </a:extLst>
         </p:spPr>
@@ -27099,7 +27133,7 @@
           </a:ln>
           <a:extLst>
             <a:ext uri="{C572A759-6A51-4108-AA02-DFA0A04FC94B}">
-              <ma14:wrappingTextBoxFlag xmlns:ma14="http://schemas.microsoft.com/office/mac/drawingml/2011/main" xmlns:a14="http://schemas.microsoft.com/office/drawing/2010/main" xmlns:m="http://schemas.openxmlformats.org/officeDocument/2006/math" xmlns="" val="1"/>
+              <ma14:wrappingTextBoxFlag xmlns="" xmlns:m="http://schemas.openxmlformats.org/officeDocument/2006/math" xmlns:a14="http://schemas.microsoft.com/office/drawing/2010/main" xmlns:ma14="http://schemas.microsoft.com/office/mac/drawingml/2011/main" val="1"/>
             </a:ext>
           </a:extLst>
         </p:spPr>
@@ -27153,7 +27187,7 @@
           </a:ln>
           <a:extLst>
             <a:ext uri="{C572A759-6A51-4108-AA02-DFA0A04FC94B}">
-              <ma14:wrappingTextBoxFlag xmlns:ma14="http://schemas.microsoft.com/office/mac/drawingml/2011/main" xmlns:a14="http://schemas.microsoft.com/office/drawing/2010/main" xmlns:m="http://schemas.openxmlformats.org/officeDocument/2006/math" xmlns="" val="1"/>
+              <ma14:wrappingTextBoxFlag xmlns="" xmlns:m="http://schemas.openxmlformats.org/officeDocument/2006/math" xmlns:a14="http://schemas.microsoft.com/office/drawing/2010/main" xmlns:ma14="http://schemas.microsoft.com/office/mac/drawingml/2011/main" val="1"/>
             </a:ext>
           </a:extLst>
         </p:spPr>
@@ -27339,7 +27373,7 @@
           </a:ln>
           <a:extLst>
             <a:ext uri="{C572A759-6A51-4108-AA02-DFA0A04FC94B}">
-              <ma14:wrappingTextBoxFlag xmlns:ma14="http://schemas.microsoft.com/office/mac/drawingml/2011/main" xmlns:a14="http://schemas.microsoft.com/office/drawing/2010/main" xmlns:m="http://schemas.openxmlformats.org/officeDocument/2006/math" xmlns="" val="1"/>
+              <ma14:wrappingTextBoxFlag xmlns="" xmlns:m="http://schemas.openxmlformats.org/officeDocument/2006/math" xmlns:a14="http://schemas.microsoft.com/office/drawing/2010/main" xmlns:ma14="http://schemas.microsoft.com/office/mac/drawingml/2011/main" val="1"/>
             </a:ext>
           </a:extLst>
         </p:spPr>
@@ -27397,7 +27431,7 @@
           </a:ln>
           <a:extLst>
             <a:ext uri="{C572A759-6A51-4108-AA02-DFA0A04FC94B}">
-              <ma14:wrappingTextBoxFlag xmlns:ma14="http://schemas.microsoft.com/office/mac/drawingml/2011/main" xmlns:a14="http://schemas.microsoft.com/office/drawing/2010/main" xmlns:m="http://schemas.openxmlformats.org/officeDocument/2006/math" xmlns="" val="1"/>
+              <ma14:wrappingTextBoxFlag xmlns="" xmlns:m="http://schemas.openxmlformats.org/officeDocument/2006/math" xmlns:a14="http://schemas.microsoft.com/office/drawing/2010/main" xmlns:ma14="http://schemas.microsoft.com/office/mac/drawingml/2011/main" val="1"/>
             </a:ext>
           </a:extLst>
         </p:spPr>
@@ -27455,7 +27489,7 @@
           </a:ln>
           <a:extLst>
             <a:ext uri="{C572A759-6A51-4108-AA02-DFA0A04FC94B}">
-              <ma14:wrappingTextBoxFlag xmlns:ma14="http://schemas.microsoft.com/office/mac/drawingml/2011/main" xmlns:a14="http://schemas.microsoft.com/office/drawing/2010/main" xmlns:m="http://schemas.openxmlformats.org/officeDocument/2006/math" xmlns="" val="1"/>
+              <ma14:wrappingTextBoxFlag xmlns="" xmlns:m="http://schemas.openxmlformats.org/officeDocument/2006/math" xmlns:a14="http://schemas.microsoft.com/office/drawing/2010/main" xmlns:ma14="http://schemas.microsoft.com/office/mac/drawingml/2011/main" val="1"/>
             </a:ext>
           </a:extLst>
         </p:spPr>
@@ -27833,7 +27867,7 @@
           </a:ln>
           <a:extLst>
             <a:ext uri="{C572A759-6A51-4108-AA02-DFA0A04FC94B}">
-              <ma14:wrappingTextBoxFlag xmlns:ma14="http://schemas.microsoft.com/office/mac/drawingml/2011/main" xmlns:a14="http://schemas.microsoft.com/office/drawing/2010/main" xmlns:m="http://schemas.openxmlformats.org/officeDocument/2006/math" xmlns="" val="1"/>
+              <ma14:wrappingTextBoxFlag xmlns="" xmlns:m="http://schemas.openxmlformats.org/officeDocument/2006/math" xmlns:a14="http://schemas.microsoft.com/office/drawing/2010/main" xmlns:ma14="http://schemas.microsoft.com/office/mac/drawingml/2011/main" val="1"/>
             </a:ext>
           </a:extLst>
         </p:spPr>
@@ -29766,7 +29800,7 @@
           </a:ln>
           <a:extLst>
             <a:ext uri="{C572A759-6A51-4108-AA02-DFA0A04FC94B}">
-              <ma14:wrappingTextBoxFlag xmlns:ma14="http://schemas.microsoft.com/office/mac/drawingml/2011/main" xmlns:a14="http://schemas.microsoft.com/office/drawing/2010/main" xmlns:m="http://schemas.openxmlformats.org/officeDocument/2006/math" xmlns="" val="1"/>
+              <ma14:wrappingTextBoxFlag xmlns="" xmlns:m="http://schemas.openxmlformats.org/officeDocument/2006/math" xmlns:a14="http://schemas.microsoft.com/office/drawing/2010/main" xmlns:ma14="http://schemas.microsoft.com/office/mac/drawingml/2011/main" val="1"/>
             </a:ext>
           </a:extLst>
         </p:spPr>
@@ -29810,7 +29844,7 @@
           </a:ln>
           <a:extLst>
             <a:ext uri="{C572A759-6A51-4108-AA02-DFA0A04FC94B}">
-              <ma14:wrappingTextBoxFlag xmlns:ma14="http://schemas.microsoft.com/office/mac/drawingml/2011/main" xmlns:a14="http://schemas.microsoft.com/office/drawing/2010/main" xmlns:m="http://schemas.openxmlformats.org/officeDocument/2006/math" xmlns="" val="1"/>
+              <ma14:wrappingTextBoxFlag xmlns="" xmlns:m="http://schemas.openxmlformats.org/officeDocument/2006/math" xmlns:a14="http://schemas.microsoft.com/office/drawing/2010/main" xmlns:ma14="http://schemas.microsoft.com/office/mac/drawingml/2011/main" val="1"/>
             </a:ext>
           </a:extLst>
         </p:spPr>
@@ -29854,7 +29888,7 @@
           </a:ln>
           <a:extLst>
             <a:ext uri="{C572A759-6A51-4108-AA02-DFA0A04FC94B}">
-              <ma14:wrappingTextBoxFlag xmlns:ma14="http://schemas.microsoft.com/office/mac/drawingml/2011/main" xmlns:a14="http://schemas.microsoft.com/office/drawing/2010/main" xmlns:m="http://schemas.openxmlformats.org/officeDocument/2006/math" xmlns="" val="1"/>
+              <ma14:wrappingTextBoxFlag xmlns="" xmlns:m="http://schemas.openxmlformats.org/officeDocument/2006/math" xmlns:a14="http://schemas.microsoft.com/office/drawing/2010/main" xmlns:ma14="http://schemas.microsoft.com/office/mac/drawingml/2011/main" val="1"/>
             </a:ext>
           </a:extLst>
         </p:spPr>
@@ -29898,7 +29932,7 @@
           </a:ln>
           <a:extLst>
             <a:ext uri="{C572A759-6A51-4108-AA02-DFA0A04FC94B}">
-              <ma14:wrappingTextBoxFlag xmlns:ma14="http://schemas.microsoft.com/office/mac/drawingml/2011/main" xmlns:a14="http://schemas.microsoft.com/office/drawing/2010/main" xmlns:m="http://schemas.openxmlformats.org/officeDocument/2006/math" xmlns="" val="1"/>
+              <ma14:wrappingTextBoxFlag xmlns="" xmlns:m="http://schemas.openxmlformats.org/officeDocument/2006/math" xmlns:a14="http://schemas.microsoft.com/office/drawing/2010/main" xmlns:ma14="http://schemas.microsoft.com/office/mac/drawingml/2011/main" val="1"/>
             </a:ext>
           </a:extLst>
         </p:spPr>
@@ -30363,7 +30397,7 @@
           </a:ln>
           <a:extLst>
             <a:ext uri="{C572A759-6A51-4108-AA02-DFA0A04FC94B}">
-              <ma14:wrappingTextBoxFlag xmlns:ma14="http://schemas.microsoft.com/office/mac/drawingml/2011/main" xmlns:a14="http://schemas.microsoft.com/office/drawing/2010/main" xmlns:m="http://schemas.openxmlformats.org/officeDocument/2006/math" xmlns="" val="1"/>
+              <ma14:wrappingTextBoxFlag xmlns="" xmlns:m="http://schemas.openxmlformats.org/officeDocument/2006/math" xmlns:a14="http://schemas.microsoft.com/office/drawing/2010/main" xmlns:ma14="http://schemas.microsoft.com/office/mac/drawingml/2011/main" val="1"/>
             </a:ext>
           </a:extLst>
         </p:spPr>

--- a/DS2_2025/Day6/yugi_lecture6_oscillation.pptx
+++ b/DS2_2025/Day6/yugi_lecture6_oscillation.pptx
@@ -23425,15 +23425,7 @@
             </a:r>
             <a:r>
               <a:rPr lang="en-GB" altLang="ja-JP" sz="2400" dirty="0" err="1"/>
-              <a:t>r</a:t>
-            </a:r>
-            <a:r>
-              <a:rPr lang="en-GB" altLang="ja-JP" sz="2400" err="1"/>
-              <a:t>.</a:t>
-            </a:r>
-            <a:r>
-              <a:rPr lang="en-GB" altLang="ja-JP" sz="2400"/>
-              <a:t>is_real</a:t>
+              <a:t>r.is_real</a:t>
             </a:r>
             <a:r>
               <a:rPr lang="en-GB" altLang="ja-JP" sz="2400" dirty="0"/>
@@ -26425,7 +26417,7 @@
         </p:nvSpPr>
         <p:spPr>
           <a:xfrm>
-            <a:off x="0" y="1143000"/>
+            <a:off x="734305" y="1143000"/>
             <a:ext cx="10075863" cy="6469063"/>
           </a:xfrm>
         </p:spPr>
@@ -26464,6 +26456,19 @@
               <a:rPr lang="ja-JP" altLang="en-US" sz="1733"/>
               <a:t>生物・化学の例が多く比較的読みやすい非線形力学系教科書</a:t>
             </a:r>
+            <a:endParaRPr lang="en-US" altLang="ja-JP" sz="1733" dirty="0"/>
+          </a:p>
+          <a:p>
+            <a:pPr marL="842404" indent="0">
+              <a:lnSpc>
+                <a:spcPct val="80000"/>
+              </a:lnSpc>
+              <a:spcBef>
+                <a:spcPts val="1700"/>
+              </a:spcBef>
+              <a:buNone/>
+            </a:pPr>
+            <a:endParaRPr lang="en-US" altLang="ja-JP" sz="2000" dirty="0"/>
           </a:p>
           <a:p>
             <a:pPr marL="1185304">
@@ -26474,6 +26479,56 @@
                 <a:spcPts val="1700"/>
               </a:spcBef>
             </a:pPr>
+            <a:r>
+              <a:rPr lang="en-US" altLang="ja-JP" sz="2000" dirty="0" err="1"/>
+              <a:t>Ozbudak</a:t>
+            </a:r>
+            <a:r>
+              <a:rPr lang="en-US" altLang="ja-JP" sz="2000" dirty="0"/>
+              <a:t>, E.M. et al.,  “</a:t>
+            </a:r>
+            <a:r>
+              <a:rPr lang="en-US" altLang="ja-JP" sz="2000" dirty="0" err="1"/>
+              <a:t>Multistability</a:t>
+            </a:r>
+            <a:r>
+              <a:rPr lang="en-US" altLang="ja-JP" sz="2000" dirty="0"/>
+              <a:t> in the lactose utilization network of Escherichia coli”, Nature 427(6976):737-40, 2004.</a:t>
+            </a:r>
+          </a:p>
+          <a:p>
+            <a:pPr marL="1777956" lvl="1">
+              <a:lnSpc>
+                <a:spcPct val="80000"/>
+              </a:lnSpc>
+              <a:spcBef>
+                <a:spcPts val="1700"/>
+              </a:spcBef>
+            </a:pPr>
+            <a:r>
+              <a:rPr lang="ja-JP" altLang="en-US" sz="1733"/>
+              <a:t>大腸菌 </a:t>
+            </a:r>
+            <a:r>
+              <a:rPr lang="en-US" altLang="ja-JP" sz="1733" dirty="0"/>
+              <a:t>lac </a:t>
+            </a:r>
+            <a:r>
+              <a:rPr lang="ja-JP" altLang="en-US" sz="1733"/>
+              <a:t>オペロンのような古典的な系で、ヒステリシスが起きることを示した</a:t>
+            </a:r>
+            <a:endParaRPr lang="en-US" altLang="ja-JP" sz="1733" dirty="0"/>
+          </a:p>
+          <a:p>
+            <a:pPr marL="842404" indent="0">
+              <a:lnSpc>
+                <a:spcPct val="80000"/>
+              </a:lnSpc>
+              <a:spcBef>
+                <a:spcPts val="1700"/>
+              </a:spcBef>
+              <a:buNone/>
+            </a:pPr>
             <a:endParaRPr lang="en-US" altLang="ja-JP" sz="2000" dirty="0"/>
           </a:p>
           <a:p>
@@ -26486,20 +26541,8 @@
               </a:spcBef>
             </a:pPr>
             <a:r>
-              <a:rPr lang="en-US" altLang="ja-JP" sz="2000" dirty="0" err="1"/>
-              <a:t>Ozbudak</a:t>
-            </a:r>
-            <a:r>
               <a:rPr lang="en-US" altLang="ja-JP" sz="2000" dirty="0"/>
-              <a:t>, E.M. et al.,  “</a:t>
-            </a:r>
-            <a:r>
-              <a:rPr lang="en-US" altLang="ja-JP" sz="2000" dirty="0" err="1"/>
-              <a:t>Multistability</a:t>
-            </a:r>
-            <a:r>
-              <a:rPr lang="en-US" altLang="ja-JP" sz="2000" dirty="0"/>
-              <a:t> in the lactose utilization network of Escherichia coli”, Nature 427(6976):737-40, 2004.</a:t>
+              <a:t>Bhalla, U.S. and Iyengar, R., “Emergent properties of networks of biological signaling pathways”, Science 283(5400):381-7.</a:t>
             </a:r>
           </a:p>
           <a:p>
@@ -26513,58 +26556,12 @@
             </a:pPr>
             <a:r>
               <a:rPr lang="ja-JP" altLang="en-US" sz="1733"/>
-              <a:t>大腸菌 </a:t>
-            </a:r>
-            <a:r>
-              <a:rPr lang="en-US" altLang="ja-JP" sz="1733" dirty="0"/>
-              <a:t>lac </a:t>
-            </a:r>
-            <a:r>
-              <a:rPr lang="ja-JP" altLang="en-US" sz="1733"/>
-              <a:t>オペロンのような古典的な系で、ヒステリシスが起きることを示した</a:t>
-            </a:r>
-          </a:p>
-          <a:p>
-            <a:pPr marL="1185304">
-              <a:lnSpc>
-                <a:spcPct val="80000"/>
-              </a:lnSpc>
-              <a:spcBef>
-                <a:spcPts val="1700"/>
-              </a:spcBef>
-            </a:pPr>
-            <a:endParaRPr lang="en-US" altLang="ja-JP" sz="2000" dirty="0"/>
-          </a:p>
-          <a:p>
-            <a:pPr marL="1185304">
-              <a:lnSpc>
-                <a:spcPct val="80000"/>
-              </a:lnSpc>
-              <a:spcBef>
-                <a:spcPts val="1700"/>
-              </a:spcBef>
-            </a:pPr>
-            <a:r>
-              <a:rPr lang="en-US" altLang="ja-JP" sz="2000" dirty="0"/>
-              <a:t>Bhalla, U.S. and Iyengar, R., “Emergent properties of networks of biological signaling pathways”, Science 283(5400):381-7.</a:t>
-            </a:r>
+              <a:t>シグナル伝達経路に生じる双安定性が記憶装置の基盤である可能性を指摘</a:t>
+            </a:r>
+            <a:endParaRPr lang="en-US" altLang="ja-JP" sz="1733" dirty="0"/>
           </a:p>
           <a:p>
             <a:pPr marL="1777956" lvl="1">
-              <a:lnSpc>
-                <a:spcPct val="80000"/>
-              </a:lnSpc>
-              <a:spcBef>
-                <a:spcPts val="1700"/>
-              </a:spcBef>
-            </a:pPr>
-            <a:r>
-              <a:rPr lang="ja-JP" altLang="en-US" sz="1733"/>
-              <a:t>シグナル伝達経路に生じる双安定性が記憶装置の基盤である可能性を指摘</a:t>
-            </a:r>
-          </a:p>
-          <a:p>
-            <a:pPr marL="1185304">
               <a:lnSpc>
                 <a:spcPct val="80000"/>
               </a:lnSpc>
